--- a/SDLC-Process/SDLC-Process-v0.2.pptx
+++ b/SDLC-Process/SDLC-Process-v0.2.pptx
@@ -5,7 +5,7 @@
     <p:sldMasterId id="2147483648" r:id="rId4"/>
   </p:sldMasterIdLst>
   <p:notesMasterIdLst>
-    <p:notesMasterId r:id="rId18"/>
+    <p:notesMasterId r:id="rId22"/>
   </p:notesMasterIdLst>
   <p:sldIdLst>
     <p:sldId id="2147471570" r:id="rId5"/>
@@ -21,10 +21,10 @@
     <p:sldId id="2147471573" r:id="rId15"/>
     <p:sldId id="2147471608" r:id="rId16"/>
     <p:sldId id="2147471619" r:id="rId17"/>
-    <p:sldId id="2147471622" r:id="rId29"/>
-    <p:sldId id="2147471623" r:id="rId30"/>
-    <p:sldId id="2147471624" r:id="rId31"/>
-    <p:sldId id="2147471625" r:id="rId32"/>
+    <p:sldId id="2147471626" r:id="rId18"/>
+    <p:sldId id="2147471627" r:id="rId19"/>
+    <p:sldId id="2147471628" r:id="rId20"/>
+    <p:sldId id="2147471629" r:id="rId21"/>
   </p:sldIdLst>
   <p:sldSz cx="12192000" cy="6858000"/>
   <p:notesSz cx="6858000" cy="9144000"/>
@@ -139,561 +139,6 @@
 </p1510:revInfo>
 </file>
 
-<file path=ppt/changesInfos/changesInfo1.xml><?xml version="1.0" encoding="utf-8"?>
-<pc:chgInfo xmlns:a="http://schemas.openxmlformats.org/drawingml/2006/main" xmlns:r="http://schemas.openxmlformats.org/officeDocument/2006/relationships" xmlns:ac="http://schemas.microsoft.com/office/drawing/2013/main/command" xmlns:pc="http://schemas.microsoft.com/office/powerpoint/2013/main/command">
-  <pc:docChgLst>
-    <pc:chgData name="Anurag Thakur" userId="9614af11-2647-48ed-a410-16d49432f426" providerId="ADAL" clId="{1986DA22-0F28-49AC-AB35-C36605FC6188}"/>
-    <pc:docChg chg="undo custSel addSld delSld modSld sldOrd">
-      <pc:chgData name="Anurag Thakur" userId="9614af11-2647-48ed-a410-16d49432f426" providerId="ADAL" clId="{1986DA22-0F28-49AC-AB35-C36605FC6188}" dt="2026-05-15T10:58:44.240" v="1170"/>
-      <pc:docMkLst>
-        <pc:docMk/>
-      </pc:docMkLst>
-      <pc:sldChg chg="delSp modSp mod">
-        <pc:chgData name="Anurag Thakur" userId="9614af11-2647-48ed-a410-16d49432f426" providerId="ADAL" clId="{1986DA22-0F28-49AC-AB35-C36605FC6188}" dt="2026-05-15T06:38:39.143" v="593" actId="20577"/>
-        <pc:sldMkLst>
-          <pc:docMk/>
-          <pc:sldMk cId="2449458203" sldId="257"/>
-        </pc:sldMkLst>
-        <pc:spChg chg="mod">
-          <ac:chgData name="Anurag Thakur" userId="9614af11-2647-48ed-a410-16d49432f426" providerId="ADAL" clId="{1986DA22-0F28-49AC-AB35-C36605FC6188}" dt="2026-05-15T06:32:14.863" v="490"/>
-          <ac:spMkLst>
-            <pc:docMk/>
-            <pc:sldMk cId="2449458203" sldId="257"/>
-            <ac:spMk id="2" creationId="{9461D42F-9392-BDF7-588A-89DC6694EB09}"/>
-          </ac:spMkLst>
-        </pc:spChg>
-        <pc:spChg chg="mod">
-          <ac:chgData name="Anurag Thakur" userId="9614af11-2647-48ed-a410-16d49432f426" providerId="ADAL" clId="{1986DA22-0F28-49AC-AB35-C36605FC6188}" dt="2026-05-15T06:38:29.723" v="591" actId="948"/>
-          <ac:spMkLst>
-            <pc:docMk/>
-            <pc:sldMk cId="2449458203" sldId="257"/>
-            <ac:spMk id="5" creationId="{EB19D89A-675B-5B43-5190-582E4131A6FA}"/>
-          </ac:spMkLst>
-        </pc:spChg>
-        <pc:spChg chg="mod">
-          <ac:chgData name="Anurag Thakur" userId="9614af11-2647-48ed-a410-16d49432f426" providerId="ADAL" clId="{1986DA22-0F28-49AC-AB35-C36605FC6188}" dt="2026-05-15T06:38:39.143" v="593" actId="20577"/>
-          <ac:spMkLst>
-            <pc:docMk/>
-            <pc:sldMk cId="2449458203" sldId="257"/>
-            <ac:spMk id="7" creationId="{CF58D9AF-E8C6-7247-AC05-2C9921A29D01}"/>
-          </ac:spMkLst>
-        </pc:spChg>
-        <pc:spChg chg="del">
-          <ac:chgData name="Anurag Thakur" userId="9614af11-2647-48ed-a410-16d49432f426" providerId="ADAL" clId="{1986DA22-0F28-49AC-AB35-C36605FC6188}" dt="2026-05-15T06:32:35.730" v="494" actId="478"/>
-          <ac:spMkLst>
-            <pc:docMk/>
-            <pc:sldMk cId="2449458203" sldId="257"/>
-            <ac:spMk id="9" creationId="{135CD3BF-85BE-CDBD-55E5-8DC42D438129}"/>
-          </ac:spMkLst>
-        </pc:spChg>
-        <pc:spChg chg="del">
-          <ac:chgData name="Anurag Thakur" userId="9614af11-2647-48ed-a410-16d49432f426" providerId="ADAL" clId="{1986DA22-0F28-49AC-AB35-C36605FC6188}" dt="2026-05-15T06:32:33.883" v="493" actId="478"/>
-          <ac:spMkLst>
-            <pc:docMk/>
-            <pc:sldMk cId="2449458203" sldId="257"/>
-            <ac:spMk id="10" creationId="{75E4D6FD-E936-08E6-749E-ECF71D2609CB}"/>
-          </ac:spMkLst>
-        </pc:spChg>
-      </pc:sldChg>
-      <pc:sldChg chg="addSp delSp modSp mod">
-        <pc:chgData name="Anurag Thakur" userId="9614af11-2647-48ed-a410-16d49432f426" providerId="ADAL" clId="{1986DA22-0F28-49AC-AB35-C36605FC6188}" dt="2026-05-15T06:31:50.460" v="488" actId="20577"/>
-        <pc:sldMkLst>
-          <pc:docMk/>
-          <pc:sldMk cId="192277875" sldId="2147471570"/>
-        </pc:sldMkLst>
-        <pc:spChg chg="add del mod">
-          <ac:chgData name="Anurag Thakur" userId="9614af11-2647-48ed-a410-16d49432f426" providerId="ADAL" clId="{1986DA22-0F28-49AC-AB35-C36605FC6188}" dt="2026-05-15T06:29:08.921" v="324" actId="478"/>
-          <ac:spMkLst>
-            <pc:docMk/>
-            <pc:sldMk cId="192277875" sldId="2147471570"/>
-            <ac:spMk id="2" creationId="{1A28640D-7B87-C48D-8226-B90A6ED48FE2}"/>
-          </ac:spMkLst>
-        </pc:spChg>
-        <pc:spChg chg="add del mod">
-          <ac:chgData name="Anurag Thakur" userId="9614af11-2647-48ed-a410-16d49432f426" providerId="ADAL" clId="{1986DA22-0F28-49AC-AB35-C36605FC6188}" dt="2026-05-15T06:29:06.791" v="323" actId="478"/>
-          <ac:spMkLst>
-            <pc:docMk/>
-            <pc:sldMk cId="192277875" sldId="2147471570"/>
-            <ac:spMk id="3" creationId="{A40F8713-7DAC-E9FE-91EE-7CD7221C3F38}"/>
-          </ac:spMkLst>
-        </pc:spChg>
-        <pc:spChg chg="mod">
-          <ac:chgData name="Anurag Thakur" userId="9614af11-2647-48ed-a410-16d49432f426" providerId="ADAL" clId="{1986DA22-0F28-49AC-AB35-C36605FC6188}" dt="2026-05-15T06:28:08.650" v="319" actId="552"/>
-          <ac:spMkLst>
-            <pc:docMk/>
-            <pc:sldMk cId="192277875" sldId="2147471570"/>
-            <ac:spMk id="4" creationId="{8949DA63-42A7-6E38-ADAA-DE7B797D4AAE}"/>
-          </ac:spMkLst>
-        </pc:spChg>
-        <pc:spChg chg="add mod">
-          <ac:chgData name="Anurag Thakur" userId="9614af11-2647-48ed-a410-16d49432f426" providerId="ADAL" clId="{1986DA22-0F28-49AC-AB35-C36605FC6188}" dt="2026-05-15T06:31:45.702" v="484" actId="20577"/>
-          <ac:spMkLst>
-            <pc:docMk/>
-            <pc:sldMk cId="192277875" sldId="2147471570"/>
-            <ac:spMk id="5" creationId="{2113736D-0C65-876F-A05C-D099466680E0}"/>
-          </ac:spMkLst>
-        </pc:spChg>
-        <pc:spChg chg="mod">
-          <ac:chgData name="Anurag Thakur" userId="9614af11-2647-48ed-a410-16d49432f426" providerId="ADAL" clId="{1986DA22-0F28-49AC-AB35-C36605FC6188}" dt="2026-05-15T06:29:47.376" v="390" actId="1035"/>
-          <ac:spMkLst>
-            <pc:docMk/>
-            <pc:sldMk cId="192277875" sldId="2147471570"/>
-            <ac:spMk id="6" creationId="{847871B0-7CF6-0123-F159-30BAE1EA87D4}"/>
-          </ac:spMkLst>
-        </pc:spChg>
-        <pc:spChg chg="add mod">
-          <ac:chgData name="Anurag Thakur" userId="9614af11-2647-48ed-a410-16d49432f426" providerId="ADAL" clId="{1986DA22-0F28-49AC-AB35-C36605FC6188}" dt="2026-05-15T06:31:50.460" v="488" actId="20577"/>
-          <ac:spMkLst>
-            <pc:docMk/>
-            <pc:sldMk cId="192277875" sldId="2147471570"/>
-            <ac:spMk id="7" creationId="{853334D1-9624-42B5-8567-8E495D66CD8D}"/>
-          </ac:spMkLst>
-        </pc:spChg>
-      </pc:sldChg>
-      <pc:sldChg chg="addSp delSp modSp mod">
-        <pc:chgData name="Anurag Thakur" userId="9614af11-2647-48ed-a410-16d49432f426" providerId="ADAL" clId="{1986DA22-0F28-49AC-AB35-C36605FC6188}" dt="2026-05-15T10:28:37.807" v="648" actId="478"/>
-        <pc:sldMkLst>
-          <pc:docMk/>
-          <pc:sldMk cId="3067669415" sldId="2147471573"/>
-        </pc:sldMkLst>
-        <pc:spChg chg="add del mod">
-          <ac:chgData name="Anurag Thakur" userId="9614af11-2647-48ed-a410-16d49432f426" providerId="ADAL" clId="{1986DA22-0F28-49AC-AB35-C36605FC6188}" dt="2026-05-15T10:28:37.807" v="648" actId="478"/>
-          <ac:spMkLst>
-            <pc:docMk/>
-            <pc:sldMk cId="3067669415" sldId="2147471573"/>
-            <ac:spMk id="3" creationId="{225C7708-3185-3FAB-FAC6-CED30DB54893}"/>
-          </ac:spMkLst>
-        </pc:spChg>
-        <pc:spChg chg="del">
-          <ac:chgData name="Anurag Thakur" userId="9614af11-2647-48ed-a410-16d49432f426" providerId="ADAL" clId="{1986DA22-0F28-49AC-AB35-C36605FC6188}" dt="2026-05-15T10:28:34.819" v="647" actId="478"/>
-          <ac:spMkLst>
-            <pc:docMk/>
-            <pc:sldMk cId="3067669415" sldId="2147471573"/>
-            <ac:spMk id="9" creationId="{030ACFC1-36B3-21B2-9429-6FBDDBDD1CCD}"/>
-          </ac:spMkLst>
-        </pc:spChg>
-      </pc:sldChg>
-      <pc:sldChg chg="del">
-        <pc:chgData name="Anurag Thakur" userId="9614af11-2647-48ed-a410-16d49432f426" providerId="ADAL" clId="{1986DA22-0F28-49AC-AB35-C36605FC6188}" dt="2026-05-15T10:27:43.208" v="628" actId="47"/>
-        <pc:sldMkLst>
-          <pc:docMk/>
-          <pc:sldMk cId="1881864494" sldId="2147471599"/>
-        </pc:sldMkLst>
-      </pc:sldChg>
-      <pc:sldChg chg="del">
-        <pc:chgData name="Anurag Thakur" userId="9614af11-2647-48ed-a410-16d49432f426" providerId="ADAL" clId="{1986DA22-0F28-49AC-AB35-C36605FC6188}" dt="2026-05-15T10:27:44.326" v="629" actId="47"/>
-        <pc:sldMkLst>
-          <pc:docMk/>
-          <pc:sldMk cId="750924650" sldId="2147471600"/>
-        </pc:sldMkLst>
-      </pc:sldChg>
-      <pc:sldChg chg="del">
-        <pc:chgData name="Anurag Thakur" userId="9614af11-2647-48ed-a410-16d49432f426" providerId="ADAL" clId="{1986DA22-0F28-49AC-AB35-C36605FC6188}" dt="2026-05-15T10:27:55.175" v="631" actId="47"/>
-        <pc:sldMkLst>
-          <pc:docMk/>
-          <pc:sldMk cId="2594986287" sldId="2147471601"/>
-        </pc:sldMkLst>
-      </pc:sldChg>
-      <pc:sldChg chg="del ord">
-        <pc:chgData name="Anurag Thakur" userId="9614af11-2647-48ed-a410-16d49432f426" providerId="ADAL" clId="{1986DA22-0F28-49AC-AB35-C36605FC6188}" dt="2026-05-15T10:27:45.714" v="630" actId="47"/>
-        <pc:sldMkLst>
-          <pc:docMk/>
-          <pc:sldMk cId="3026843719" sldId="2147471602"/>
-        </pc:sldMkLst>
-      </pc:sldChg>
-      <pc:sldChg chg="del">
-        <pc:chgData name="Anurag Thakur" userId="9614af11-2647-48ed-a410-16d49432f426" providerId="ADAL" clId="{1986DA22-0F28-49AC-AB35-C36605FC6188}" dt="2026-05-15T10:27:56.428" v="632" actId="47"/>
-        <pc:sldMkLst>
-          <pc:docMk/>
-          <pc:sldMk cId="2872203102" sldId="2147471603"/>
-        </pc:sldMkLst>
-      </pc:sldChg>
-      <pc:sldChg chg="addSp delSp modSp add mod">
-        <pc:chgData name="Anurag Thakur" userId="9614af11-2647-48ed-a410-16d49432f426" providerId="ADAL" clId="{1986DA22-0F28-49AC-AB35-C36605FC6188}" dt="2026-05-15T10:41:17.755" v="772" actId="113"/>
-        <pc:sldMkLst>
-          <pc:docMk/>
-          <pc:sldMk cId="805030408" sldId="2147471604"/>
-        </pc:sldMkLst>
-        <pc:spChg chg="mod">
-          <ac:chgData name="Anurag Thakur" userId="9614af11-2647-48ed-a410-16d49432f426" providerId="ADAL" clId="{1986DA22-0F28-49AC-AB35-C36605FC6188}" dt="2026-05-15T06:34:09.252" v="512"/>
-          <ac:spMkLst>
-            <pc:docMk/>
-            <pc:sldMk cId="805030408" sldId="2147471604"/>
-            <ac:spMk id="2" creationId="{EF486554-3647-DFEE-1BA5-80DD59FC392C}"/>
-          </ac:spMkLst>
-        </pc:spChg>
-        <pc:graphicFrameChg chg="mod modGraphic">
-          <ac:chgData name="Anurag Thakur" userId="9614af11-2647-48ed-a410-16d49432f426" providerId="ADAL" clId="{1986DA22-0F28-49AC-AB35-C36605FC6188}" dt="2026-05-15T10:41:17.755" v="772" actId="113"/>
-          <ac:graphicFrameMkLst>
-            <pc:docMk/>
-            <pc:sldMk cId="805030408" sldId="2147471604"/>
-            <ac:graphicFrameMk id="3" creationId="{251EFEF3-355E-EA82-7D5E-46193409088A}"/>
-          </ac:graphicFrameMkLst>
-        </pc:graphicFrameChg>
-        <pc:graphicFrameChg chg="add del">
-          <ac:chgData name="Anurag Thakur" userId="9614af11-2647-48ed-a410-16d49432f426" providerId="ADAL" clId="{1986DA22-0F28-49AC-AB35-C36605FC6188}" dt="2026-05-15T06:38:45.399" v="594" actId="478"/>
-          <ac:graphicFrameMkLst>
-            <pc:docMk/>
-            <pc:sldMk cId="805030408" sldId="2147471604"/>
-            <ac:graphicFrameMk id="4" creationId="{EF8A1929-30CD-C82A-C070-39DF9861660C}"/>
-          </ac:graphicFrameMkLst>
-        </pc:graphicFrameChg>
-      </pc:sldChg>
-      <pc:sldChg chg="addSp delSp modSp add mod">
-        <pc:chgData name="Anurag Thakur" userId="9614af11-2647-48ed-a410-16d49432f426" providerId="ADAL" clId="{1986DA22-0F28-49AC-AB35-C36605FC6188}" dt="2026-05-15T10:40:41.476" v="768" actId="404"/>
-        <pc:sldMkLst>
-          <pc:docMk/>
-          <pc:sldMk cId="324800735" sldId="2147471605"/>
-        </pc:sldMkLst>
-        <pc:spChg chg="mod">
-          <ac:chgData name="Anurag Thakur" userId="9614af11-2647-48ed-a410-16d49432f426" providerId="ADAL" clId="{1986DA22-0F28-49AC-AB35-C36605FC6188}" dt="2026-05-15T06:37:08.609" v="559"/>
-          <ac:spMkLst>
-            <pc:docMk/>
-            <pc:sldMk cId="324800735" sldId="2147471605"/>
-            <ac:spMk id="2" creationId="{B5FB35CA-A18C-E0B7-EB1D-5708A17C6823}"/>
-          </ac:spMkLst>
-        </pc:spChg>
-        <pc:spChg chg="add del">
-          <ac:chgData name="Anurag Thakur" userId="9614af11-2647-48ed-a410-16d49432f426" providerId="ADAL" clId="{1986DA22-0F28-49AC-AB35-C36605FC6188}" dt="2026-05-15T07:08:56.129" v="596" actId="22"/>
-          <ac:spMkLst>
-            <pc:docMk/>
-            <pc:sldMk cId="324800735" sldId="2147471605"/>
-            <ac:spMk id="4" creationId="{A9098C71-6884-E9C4-F110-5C913CE91C3C}"/>
-          </ac:spMkLst>
-        </pc:spChg>
-        <pc:spChg chg="mod">
-          <ac:chgData name="Anurag Thakur" userId="9614af11-2647-48ed-a410-16d49432f426" providerId="ADAL" clId="{1986DA22-0F28-49AC-AB35-C36605FC6188}" dt="2026-05-15T10:40:41.476" v="768" actId="404"/>
-          <ac:spMkLst>
-            <pc:docMk/>
-            <pc:sldMk cId="324800735" sldId="2147471605"/>
-            <ac:spMk id="5" creationId="{F78600FE-72CE-9C92-895B-756D8CA82DC2}"/>
-          </ac:spMkLst>
-        </pc:spChg>
-        <pc:spChg chg="mod">
-          <ac:chgData name="Anurag Thakur" userId="9614af11-2647-48ed-a410-16d49432f426" providerId="ADAL" clId="{1986DA22-0F28-49AC-AB35-C36605FC6188}" dt="2026-05-15T06:37:22.021" v="582" actId="20577"/>
-          <ac:spMkLst>
-            <pc:docMk/>
-            <pc:sldMk cId="324800735" sldId="2147471605"/>
-            <ac:spMk id="7" creationId="{411A6709-A689-E8BD-FB40-655E12FF0850}"/>
-          </ac:spMkLst>
-        </pc:spChg>
-      </pc:sldChg>
-      <pc:sldChg chg="modSp add mod">
-        <pc:chgData name="Anurag Thakur" userId="9614af11-2647-48ed-a410-16d49432f426" providerId="ADAL" clId="{1986DA22-0F28-49AC-AB35-C36605FC6188}" dt="2026-05-15T10:40:16.268" v="766" actId="113"/>
-        <pc:sldMkLst>
-          <pc:docMk/>
-          <pc:sldMk cId="560300799" sldId="2147471606"/>
-        </pc:sldMkLst>
-        <pc:spChg chg="mod">
-          <ac:chgData name="Anurag Thakur" userId="9614af11-2647-48ed-a410-16d49432f426" providerId="ADAL" clId="{1986DA22-0F28-49AC-AB35-C36605FC6188}" dt="2026-05-15T07:09:29.810" v="603" actId="21"/>
-          <ac:spMkLst>
-            <pc:docMk/>
-            <pc:sldMk cId="560300799" sldId="2147471606"/>
-            <ac:spMk id="2" creationId="{5B834C62-2069-F8CB-438A-EF4F62926FCF}"/>
-          </ac:spMkLst>
-        </pc:spChg>
-        <pc:spChg chg="mod">
-          <ac:chgData name="Anurag Thakur" userId="9614af11-2647-48ed-a410-16d49432f426" providerId="ADAL" clId="{1986DA22-0F28-49AC-AB35-C36605FC6188}" dt="2026-05-15T10:40:16.268" v="766" actId="113"/>
-          <ac:spMkLst>
-            <pc:docMk/>
-            <pc:sldMk cId="560300799" sldId="2147471606"/>
-            <ac:spMk id="5" creationId="{2E715615-E774-0395-1644-2F3780E8D213}"/>
-          </ac:spMkLst>
-        </pc:spChg>
-        <pc:spChg chg="mod">
-          <ac:chgData name="Anurag Thakur" userId="9614af11-2647-48ed-a410-16d49432f426" providerId="ADAL" clId="{1986DA22-0F28-49AC-AB35-C36605FC6188}" dt="2026-05-15T07:09:36.446" v="604"/>
-          <ac:spMkLst>
-            <pc:docMk/>
-            <pc:sldMk cId="560300799" sldId="2147471606"/>
-            <ac:spMk id="7" creationId="{A57FF885-7B4E-0780-E9E4-E85A69AC4558}"/>
-          </ac:spMkLst>
-        </pc:spChg>
-      </pc:sldChg>
-      <pc:sldChg chg="modSp add mod">
-        <pc:chgData name="Anurag Thakur" userId="9614af11-2647-48ed-a410-16d49432f426" providerId="ADAL" clId="{1986DA22-0F28-49AC-AB35-C36605FC6188}" dt="2026-05-15T10:43:30.906" v="773" actId="2711"/>
-        <pc:sldMkLst>
-          <pc:docMk/>
-          <pc:sldMk cId="1687928939" sldId="2147471607"/>
-        </pc:sldMkLst>
-        <pc:spChg chg="mod">
-          <ac:chgData name="Anurag Thakur" userId="9614af11-2647-48ed-a410-16d49432f426" providerId="ADAL" clId="{1986DA22-0F28-49AC-AB35-C36605FC6188}" dt="2026-05-15T10:26:23.082" v="610"/>
-          <ac:spMkLst>
-            <pc:docMk/>
-            <pc:sldMk cId="1687928939" sldId="2147471607"/>
-            <ac:spMk id="2" creationId="{2AFA66F2-6749-C77F-1BF8-D47D29084BA0}"/>
-          </ac:spMkLst>
-        </pc:spChg>
-        <pc:spChg chg="mod">
-          <ac:chgData name="Anurag Thakur" userId="9614af11-2647-48ed-a410-16d49432f426" providerId="ADAL" clId="{1986DA22-0F28-49AC-AB35-C36605FC6188}" dt="2026-05-15T10:43:30.906" v="773" actId="2711"/>
-          <ac:spMkLst>
-            <pc:docMk/>
-            <pc:sldMk cId="1687928939" sldId="2147471607"/>
-            <ac:spMk id="5" creationId="{62D300E3-B425-51BA-C36A-5F0C7CA4EF70}"/>
-          </ac:spMkLst>
-        </pc:spChg>
-        <pc:spChg chg="mod">
-          <ac:chgData name="Anurag Thakur" userId="9614af11-2647-48ed-a410-16d49432f426" providerId="ADAL" clId="{1986DA22-0F28-49AC-AB35-C36605FC6188}" dt="2026-05-15T10:27:39.526" v="627" actId="20577"/>
-          <ac:spMkLst>
-            <pc:docMk/>
-            <pc:sldMk cId="1687928939" sldId="2147471607"/>
-            <ac:spMk id="7" creationId="{3141CB97-1F47-38A7-CE04-3A826CAA903D}"/>
-          </ac:spMkLst>
-        </pc:spChg>
-      </pc:sldChg>
-      <pc:sldChg chg="addSp delSp modSp add mod">
-        <pc:chgData name="Anurag Thakur" userId="9614af11-2647-48ed-a410-16d49432f426" providerId="ADAL" clId="{1986DA22-0F28-49AC-AB35-C36605FC6188}" dt="2026-05-15T10:28:30.708" v="646" actId="478"/>
-        <pc:sldMkLst>
-          <pc:docMk/>
-          <pc:sldMk cId="2241370312" sldId="2147471608"/>
-        </pc:sldMkLst>
-        <pc:spChg chg="add del mod">
-          <ac:chgData name="Anurag Thakur" userId="9614af11-2647-48ed-a410-16d49432f426" providerId="ADAL" clId="{1986DA22-0F28-49AC-AB35-C36605FC6188}" dt="2026-05-15T10:28:30.708" v="646" actId="478"/>
-          <ac:spMkLst>
-            <pc:docMk/>
-            <pc:sldMk cId="2241370312" sldId="2147471608"/>
-            <ac:spMk id="3" creationId="{F6A1273E-2C6D-B10E-87E6-58CCB0223ED5}"/>
-          </ac:spMkLst>
-        </pc:spChg>
-        <pc:spChg chg="mod">
-          <ac:chgData name="Anurag Thakur" userId="9614af11-2647-48ed-a410-16d49432f426" providerId="ADAL" clId="{1986DA22-0F28-49AC-AB35-C36605FC6188}" dt="2026-05-15T10:28:23.914" v="644" actId="20577"/>
-          <ac:spMkLst>
-            <pc:docMk/>
-            <pc:sldMk cId="2241370312" sldId="2147471608"/>
-            <ac:spMk id="8" creationId="{22E653E0-7327-1C8F-550C-1CC3EFE4EC4E}"/>
-          </ac:spMkLst>
-        </pc:spChg>
-        <pc:spChg chg="del">
-          <ac:chgData name="Anurag Thakur" userId="9614af11-2647-48ed-a410-16d49432f426" providerId="ADAL" clId="{1986DA22-0F28-49AC-AB35-C36605FC6188}" dt="2026-05-15T10:28:26.840" v="645" actId="478"/>
-          <ac:spMkLst>
-            <pc:docMk/>
-            <pc:sldMk cId="2241370312" sldId="2147471608"/>
-            <ac:spMk id="9" creationId="{05046E6F-7FF0-AF55-3FEB-8CF6F0D31C37}"/>
-          </ac:spMkLst>
-        </pc:spChg>
-      </pc:sldChg>
-      <pc:sldChg chg="add del">
-        <pc:chgData name="Anurag Thakur" userId="9614af11-2647-48ed-a410-16d49432f426" providerId="ADAL" clId="{1986DA22-0F28-49AC-AB35-C36605FC6188}" dt="2026-05-15T10:28:59.371" v="650" actId="47"/>
-        <pc:sldMkLst>
-          <pc:docMk/>
-          <pc:sldMk cId="875108794" sldId="2147471609"/>
-        </pc:sldMkLst>
-      </pc:sldChg>
-      <pc:sldChg chg="addSp delSp modSp add mod">
-        <pc:chgData name="Anurag Thakur" userId="9614af11-2647-48ed-a410-16d49432f426" providerId="ADAL" clId="{1986DA22-0F28-49AC-AB35-C36605FC6188}" dt="2026-05-15T10:43:46.447" v="774" actId="2711"/>
-        <pc:sldMkLst>
-          <pc:docMk/>
-          <pc:sldMk cId="2355027959" sldId="2147471609"/>
-        </pc:sldMkLst>
-        <pc:graphicFrameChg chg="mod modGraphic">
-          <ac:chgData name="Anurag Thakur" userId="9614af11-2647-48ed-a410-16d49432f426" providerId="ADAL" clId="{1986DA22-0F28-49AC-AB35-C36605FC6188}" dt="2026-05-15T10:43:46.447" v="774" actId="2711"/>
-          <ac:graphicFrameMkLst>
-            <pc:docMk/>
-            <pc:sldMk cId="2355027959" sldId="2147471609"/>
-            <ac:graphicFrameMk id="3" creationId="{08C04D27-AAD0-5ECE-B606-741978AC47AB}"/>
-          </ac:graphicFrameMkLst>
-        </pc:graphicFrameChg>
-        <pc:graphicFrameChg chg="add del mod">
-          <ac:chgData name="Anurag Thakur" userId="9614af11-2647-48ed-a410-16d49432f426" providerId="ADAL" clId="{1986DA22-0F28-49AC-AB35-C36605FC6188}" dt="2026-05-15T10:31:59.364" v="696" actId="21"/>
-          <ac:graphicFrameMkLst>
-            <pc:docMk/>
-            <pc:sldMk cId="2355027959" sldId="2147471609"/>
-            <ac:graphicFrameMk id="4" creationId="{3015A428-0B05-FC5A-AD4B-A4B4B0F38347}"/>
-          </ac:graphicFrameMkLst>
-        </pc:graphicFrameChg>
-      </pc:sldChg>
-      <pc:sldChg chg="addSp modSp add mod">
-        <pc:chgData name="Anurag Thakur" userId="9614af11-2647-48ed-a410-16d49432f426" providerId="ADAL" clId="{1986DA22-0F28-49AC-AB35-C36605FC6188}" dt="2026-05-15T10:44:13.076" v="782" actId="2711"/>
-        <pc:sldMkLst>
-          <pc:docMk/>
-          <pc:sldMk cId="2432474832" sldId="2147471610"/>
-        </pc:sldMkLst>
-        <pc:spChg chg="mod">
-          <ac:chgData name="Anurag Thakur" userId="9614af11-2647-48ed-a410-16d49432f426" providerId="ADAL" clId="{1986DA22-0F28-49AC-AB35-C36605FC6188}" dt="2026-05-15T10:35:09.314" v="704"/>
-          <ac:spMkLst>
-            <pc:docMk/>
-            <pc:sldMk cId="2432474832" sldId="2147471610"/>
-            <ac:spMk id="2" creationId="{828B2728-DCDE-61E1-1C05-4E7C701FF2DD}"/>
-          </ac:spMkLst>
-        </pc:spChg>
-        <pc:spChg chg="add mod">
-          <ac:chgData name="Anurag Thakur" userId="9614af11-2647-48ed-a410-16d49432f426" providerId="ADAL" clId="{1986DA22-0F28-49AC-AB35-C36605FC6188}" dt="2026-05-15T10:37:18.199" v="751" actId="20577"/>
-          <ac:spMkLst>
-            <pc:docMk/>
-            <pc:sldMk cId="2432474832" sldId="2147471610"/>
-            <ac:spMk id="3" creationId="{2B689D0B-1EFB-F06D-D1D5-C261F84BFDFC}"/>
-          </ac:spMkLst>
-        </pc:spChg>
-        <pc:spChg chg="add mod">
-          <ac:chgData name="Anurag Thakur" userId="9614af11-2647-48ed-a410-16d49432f426" providerId="ADAL" clId="{1986DA22-0F28-49AC-AB35-C36605FC6188}" dt="2026-05-15T10:36:18.363" v="712"/>
-          <ac:spMkLst>
-            <pc:docMk/>
-            <pc:sldMk cId="2432474832" sldId="2147471610"/>
-            <ac:spMk id="4" creationId="{2893A7A6-082C-6294-4F9E-C16B719E2D79}"/>
-          </ac:spMkLst>
-        </pc:spChg>
-        <pc:spChg chg="mod">
-          <ac:chgData name="Anurag Thakur" userId="9614af11-2647-48ed-a410-16d49432f426" providerId="ADAL" clId="{1986DA22-0F28-49AC-AB35-C36605FC6188}" dt="2026-05-15T10:44:03.205" v="781" actId="6549"/>
-          <ac:spMkLst>
-            <pc:docMk/>
-            <pc:sldMk cId="2432474832" sldId="2147471610"/>
-            <ac:spMk id="5" creationId="{7430FB3D-852C-A80C-5437-A18D9015DC65}"/>
-          </ac:spMkLst>
-        </pc:spChg>
-        <pc:spChg chg="add mod">
-          <ac:chgData name="Anurag Thakur" userId="9614af11-2647-48ed-a410-16d49432f426" providerId="ADAL" clId="{1986DA22-0F28-49AC-AB35-C36605FC6188}" dt="2026-05-15T10:44:13.076" v="782" actId="2711"/>
-          <ac:spMkLst>
-            <pc:docMk/>
-            <pc:sldMk cId="2432474832" sldId="2147471610"/>
-            <ac:spMk id="6" creationId="{F3DBF1B0-25C2-8FEE-A710-AFCA3B3F9AE4}"/>
-          </ac:spMkLst>
-        </pc:spChg>
-        <pc:spChg chg="mod">
-          <ac:chgData name="Anurag Thakur" userId="9614af11-2647-48ed-a410-16d49432f426" providerId="ADAL" clId="{1986DA22-0F28-49AC-AB35-C36605FC6188}" dt="2026-05-15T10:37:05.784" v="728" actId="20577"/>
-          <ac:spMkLst>
-            <pc:docMk/>
-            <pc:sldMk cId="2432474832" sldId="2147471610"/>
-            <ac:spMk id="7" creationId="{DC0DC57B-A144-34E6-EF8B-A3A5A0EA6E14}"/>
-          </ac:spMkLst>
-        </pc:spChg>
-      </pc:sldChg>
-      <pc:sldChg chg="add del">
-        <pc:chgData name="Anurag Thakur" userId="9614af11-2647-48ed-a410-16d49432f426" providerId="ADAL" clId="{1986DA22-0F28-49AC-AB35-C36605FC6188}" dt="2026-05-15T10:32:25.428" v="697" actId="47"/>
-        <pc:sldMkLst>
-          <pc:docMk/>
-          <pc:sldMk cId="2483218192" sldId="2147471610"/>
-        </pc:sldMkLst>
-      </pc:sldChg>
-      <pc:sldChg chg="addSp delSp modSp add mod">
-        <pc:chgData name="Anurag Thakur" userId="9614af11-2647-48ed-a410-16d49432f426" providerId="ADAL" clId="{1986DA22-0F28-49AC-AB35-C36605FC6188}" dt="2026-05-15T10:58:12.456" v="1169" actId="403"/>
-        <pc:sldMkLst>
-          <pc:docMk/>
-          <pc:sldMk cId="2942405917" sldId="2147471611"/>
-        </pc:sldMkLst>
-        <pc:spChg chg="add mod">
-          <ac:chgData name="Anurag Thakur" userId="9614af11-2647-48ed-a410-16d49432f426" providerId="ADAL" clId="{1986DA22-0F28-49AC-AB35-C36605FC6188}" dt="2026-05-15T10:56:40.491" v="1116" actId="1036"/>
-          <ac:spMkLst>
-            <pc:docMk/>
-            <pc:sldMk cId="2942405917" sldId="2147471611"/>
-            <ac:spMk id="12" creationId="{ADCC97CA-0D84-39F8-EF5D-DB7E621E6C72}"/>
-          </ac:spMkLst>
-        </pc:spChg>
-        <pc:spChg chg="add mod">
-          <ac:chgData name="Anurag Thakur" userId="9614af11-2647-48ed-a410-16d49432f426" providerId="ADAL" clId="{1986DA22-0F28-49AC-AB35-C36605FC6188}" dt="2026-05-15T10:56:40.491" v="1116" actId="1036"/>
-          <ac:spMkLst>
-            <pc:docMk/>
-            <pc:sldMk cId="2942405917" sldId="2147471611"/>
-            <ac:spMk id="13" creationId="{B4CA57D8-A043-EB21-6380-C8A78C5087EF}"/>
-          </ac:spMkLst>
-        </pc:spChg>
-        <pc:spChg chg="add mod">
-          <ac:chgData name="Anurag Thakur" userId="9614af11-2647-48ed-a410-16d49432f426" providerId="ADAL" clId="{1986DA22-0F28-49AC-AB35-C36605FC6188}" dt="2026-05-15T10:57:38.387" v="1156" actId="1036"/>
-          <ac:spMkLst>
-            <pc:docMk/>
-            <pc:sldMk cId="2942405917" sldId="2147471611"/>
-            <ac:spMk id="14" creationId="{E0EC9FC3-CABF-68EB-79A7-843584906490}"/>
-          </ac:spMkLst>
-        </pc:spChg>
-        <pc:spChg chg="add mod">
-          <ac:chgData name="Anurag Thakur" userId="9614af11-2647-48ed-a410-16d49432f426" providerId="ADAL" clId="{1986DA22-0F28-49AC-AB35-C36605FC6188}" dt="2026-05-15T10:57:42.261" v="1157" actId="14100"/>
-          <ac:spMkLst>
-            <pc:docMk/>
-            <pc:sldMk cId="2942405917" sldId="2147471611"/>
-            <ac:spMk id="15" creationId="{A0BA5B06-034A-4069-C4F4-1FAE7B10D9A2}"/>
-          </ac:spMkLst>
-        </pc:spChg>
-        <pc:graphicFrameChg chg="add del mod modGraphic">
-          <ac:chgData name="Anurag Thakur" userId="9614af11-2647-48ed-a410-16d49432f426" providerId="ADAL" clId="{1986DA22-0F28-49AC-AB35-C36605FC6188}" dt="2026-05-15T10:58:12.456" v="1169" actId="403"/>
-          <ac:graphicFrameMkLst>
-            <pc:docMk/>
-            <pc:sldMk cId="2942405917" sldId="2147471611"/>
-            <ac:graphicFrameMk id="3" creationId="{6EC54516-8F02-AA0B-8A5C-3CA35BFB524E}"/>
-          </ac:graphicFrameMkLst>
-        </pc:graphicFrameChg>
-        <pc:graphicFrameChg chg="add del mod modGraphic">
-          <ac:chgData name="Anurag Thakur" userId="9614af11-2647-48ed-a410-16d49432f426" providerId="ADAL" clId="{1986DA22-0F28-49AC-AB35-C36605FC6188}" dt="2026-05-15T10:49:43.393" v="983" actId="478"/>
-          <ac:graphicFrameMkLst>
-            <pc:docMk/>
-            <pc:sldMk cId="2942405917" sldId="2147471611"/>
-            <ac:graphicFrameMk id="4" creationId="{A6582088-33FA-563E-054E-5C6CEC531C44}"/>
-          </ac:graphicFrameMkLst>
-        </pc:graphicFrameChg>
-        <pc:graphicFrameChg chg="add del mod modGraphic">
-          <ac:chgData name="Anurag Thakur" userId="9614af11-2647-48ed-a410-16d49432f426" providerId="ADAL" clId="{1986DA22-0F28-49AC-AB35-C36605FC6188}" dt="2026-05-15T10:49:43.393" v="983" actId="478"/>
-          <ac:graphicFrameMkLst>
-            <pc:docMk/>
-            <pc:sldMk cId="2942405917" sldId="2147471611"/>
-            <ac:graphicFrameMk id="5" creationId="{A2C2EDFE-01F4-9597-8C9F-A16370F8171E}"/>
-          </ac:graphicFrameMkLst>
-        </pc:graphicFrameChg>
-        <pc:graphicFrameChg chg="add del mod modGraphic">
-          <ac:chgData name="Anurag Thakur" userId="9614af11-2647-48ed-a410-16d49432f426" providerId="ADAL" clId="{1986DA22-0F28-49AC-AB35-C36605FC6188}" dt="2026-05-15T10:49:43.393" v="983" actId="478"/>
-          <ac:graphicFrameMkLst>
-            <pc:docMk/>
-            <pc:sldMk cId="2942405917" sldId="2147471611"/>
-            <ac:graphicFrameMk id="6" creationId="{AA77E545-BF70-9905-0985-0CA9CC961C63}"/>
-          </ac:graphicFrameMkLst>
-        </pc:graphicFrameChg>
-        <pc:graphicFrameChg chg="add del mod modGraphic">
-          <ac:chgData name="Anurag Thakur" userId="9614af11-2647-48ed-a410-16d49432f426" providerId="ADAL" clId="{1986DA22-0F28-49AC-AB35-C36605FC6188}" dt="2026-05-15T10:49:43.393" v="983" actId="478"/>
-          <ac:graphicFrameMkLst>
-            <pc:docMk/>
-            <pc:sldMk cId="2942405917" sldId="2147471611"/>
-            <ac:graphicFrameMk id="7" creationId="{14D889B5-6CAA-F7C7-5A20-3E0A0A3D9B68}"/>
-          </ac:graphicFrameMkLst>
-        </pc:graphicFrameChg>
-        <pc:graphicFrameChg chg="add mod modGraphic">
-          <ac:chgData name="Anurag Thakur" userId="9614af11-2647-48ed-a410-16d49432f426" providerId="ADAL" clId="{1986DA22-0F28-49AC-AB35-C36605FC6188}" dt="2026-05-15T10:58:09.796" v="1168" actId="403"/>
-          <ac:graphicFrameMkLst>
-            <pc:docMk/>
-            <pc:sldMk cId="2942405917" sldId="2147471611"/>
-            <ac:graphicFrameMk id="8" creationId="{A18B9E7B-C881-476B-0100-FFA2B0E369B7}"/>
-          </ac:graphicFrameMkLst>
-        </pc:graphicFrameChg>
-        <pc:graphicFrameChg chg="add mod modGraphic">
-          <ac:chgData name="Anurag Thakur" userId="9614af11-2647-48ed-a410-16d49432f426" providerId="ADAL" clId="{1986DA22-0F28-49AC-AB35-C36605FC6188}" dt="2026-05-15T10:58:07.300" v="1167" actId="403"/>
-          <ac:graphicFrameMkLst>
-            <pc:docMk/>
-            <pc:sldMk cId="2942405917" sldId="2147471611"/>
-            <ac:graphicFrameMk id="9" creationId="{0BA88DBB-B79E-6FA1-851E-8BE95E4ACF11}"/>
-          </ac:graphicFrameMkLst>
-        </pc:graphicFrameChg>
-        <pc:graphicFrameChg chg="add mod modGraphic">
-          <ac:chgData name="Anurag Thakur" userId="9614af11-2647-48ed-a410-16d49432f426" providerId="ADAL" clId="{1986DA22-0F28-49AC-AB35-C36605FC6188}" dt="2026-05-15T10:57:25.123" v="1142" actId="403"/>
-          <ac:graphicFrameMkLst>
-            <pc:docMk/>
-            <pc:sldMk cId="2942405917" sldId="2147471611"/>
-            <ac:graphicFrameMk id="10" creationId="{6C2F6013-8424-292F-324B-44CFC580D0F4}"/>
-          </ac:graphicFrameMkLst>
-        </pc:graphicFrameChg>
-        <pc:graphicFrameChg chg="add mod modGraphic">
-          <ac:chgData name="Anurag Thakur" userId="9614af11-2647-48ed-a410-16d49432f426" providerId="ADAL" clId="{1986DA22-0F28-49AC-AB35-C36605FC6188}" dt="2026-05-15T10:58:03.617" v="1166" actId="403"/>
-          <ac:graphicFrameMkLst>
-            <pc:docMk/>
-            <pc:sldMk cId="2942405917" sldId="2147471611"/>
-            <ac:graphicFrameMk id="11" creationId="{B4AA9DF6-B6F0-8050-3ED2-589843E942CF}"/>
-          </ac:graphicFrameMkLst>
-        </pc:graphicFrameChg>
-      </pc:sldChg>
-      <pc:sldChg chg="modSp add mod">
-        <pc:chgData name="Anurag Thakur" userId="9614af11-2647-48ed-a410-16d49432f426" providerId="ADAL" clId="{1986DA22-0F28-49AC-AB35-C36605FC6188}" dt="2026-05-15T10:58:44.240" v="1170"/>
-        <pc:sldMkLst>
-          <pc:docMk/>
-          <pc:sldMk cId="97022162" sldId="2147471612"/>
-        </pc:sldMkLst>
-        <pc:spChg chg="mod">
-          <ac:chgData name="Anurag Thakur" userId="9614af11-2647-48ed-a410-16d49432f426" providerId="ADAL" clId="{1986DA22-0F28-49AC-AB35-C36605FC6188}" dt="2026-05-15T10:58:44.240" v="1170"/>
-          <ac:spMkLst>
-            <pc:docMk/>
-            <pc:sldMk cId="97022162" sldId="2147471612"/>
-            <ac:spMk id="2" creationId="{31FE3315-0BC8-018D-1079-3D3F3649D438}"/>
-          </ac:spMkLst>
-        </pc:spChg>
-      </pc:sldChg>
-    </pc:docChg>
-  </pc:docChgLst>
-</pc:chgInfo>
-</file>
-
 <file path=ppt/notesMasters/notesMaster1.xml><?xml version="1.0" encoding="utf-8"?>
 <p:notesMaster xmlns:a="http://schemas.openxmlformats.org/drawingml/2006/main" xmlns:r="http://schemas.openxmlformats.org/officeDocument/2006/relationships" xmlns:p="http://schemas.openxmlformats.org/presentationml/2006/main">
   <p:cSld>
@@ -776,7 +221,7 @@
           <a:p>
             <a:fld id="{FC04A7A5-02AC-4F9D-89DE-E5CE16720F29}" type="datetimeFigureOut">
               <a:rPr lang="en-IN" smtClean="0"/>
-              <a:t>11-06-2026</a:t>
+              <a:t>12-06-2026</a:t>
             </a:fld>
             <a:endParaRPr lang="en-IN"/>
           </a:p>
@@ -20291,18 +19736,37 @@
 </file>
 
 <file path=ppt/slides/slide14.xml><?xml version="1.0" encoding="utf-8"?>
-<p:sld xmlns:a="http://schemas.openxmlformats.org/drawingml/2006/main" xmlns:p="http://schemas.openxmlformats.org/presentationml/2006/main" xmlns:r="http://schemas.openxmlformats.org/officeDocument/2006/relationships">
+<p:sld xmlns:a="http://schemas.openxmlformats.org/drawingml/2006/main" xmlns:r="http://schemas.openxmlformats.org/officeDocument/2006/relationships" xmlns:p="http://schemas.openxmlformats.org/presentationml/2006/main">
   <p:cSld>
     <p:spTree>
       <p:nvGrpSpPr>
-        <p:cNvPr id="1" name=""/>
+        <p:cNvPr id="1" name="">
+          <a:extLst>
+            <a:ext uri="{FF2B5EF4-FFF2-40B4-BE49-F238E27FC236}">
+              <a16:creationId xmlns:a16="http://schemas.microsoft.com/office/drawing/2014/main" id="{0BFB507B-A961-6C77-6F61-71DB4DC688E3}"/>
+            </a:ext>
+          </a:extLst>
+        </p:cNvPr>
         <p:cNvGrpSpPr/>
         <p:nvPr/>
       </p:nvGrpSpPr>
-      <p:grpSpPr/>
+      <p:grpSpPr>
+        <a:xfrm>
+          <a:off x="0" y="0"/>
+          <a:ext cx="0" cy="0"/>
+          <a:chOff x="0" y="0"/>
+          <a:chExt cx="0" cy="0"/>
+        </a:xfrm>
+      </p:grpSpPr>
       <p:sp>
         <p:nvSpPr>
-          <p:cNvPr id="2" name="Title 1"/>
+          <p:cNvPr id="2" name="Title 1" descr="decorative: Title 1">
+            <a:extLst>
+              <a:ext uri="{FF2B5EF4-FFF2-40B4-BE49-F238E27FC236}">
+                <a16:creationId xmlns:a16="http://schemas.microsoft.com/office/drawing/2014/main" id="{B4FCC7DF-2C19-5CAF-AEA2-4A42F96B297A}"/>
+              </a:ext>
+            </a:extLst>
+          </p:cNvPr>
           <p:cNvSpPr>
             <a:spLocks noGrp="1"/>
           </p:cNvSpPr>
@@ -20316,128 +19780,531 @@
           <a:lstStyle/>
           <a:p>
             <a:r>
-              <a:t>SDLC In Your Repo &amp; Pipeline</a:t>
+              <a:rPr lang="en-US" b="1" dirty="0"/>
+              <a:t>SDLC In Your</a:t>
+            </a:r>
+            <a:endParaRPr lang="en-IN" b="1" dirty="0"/>
+          </a:p>
+        </p:txBody>
+      </p:sp>
+      <p:sp>
+        <p:nvSpPr>
+          <p:cNvPr id="5" name="Content Placeholder 1" descr="decorative: Content Placeholder 1">
+            <a:extLst>
+              <a:ext uri="{FF2B5EF4-FFF2-40B4-BE49-F238E27FC236}">
+                <a16:creationId xmlns:a16="http://schemas.microsoft.com/office/drawing/2014/main" id="{142F3460-61B9-195F-DCDD-0F32566F02A0}"/>
+              </a:ext>
+            </a:extLst>
+          </p:cNvPr>
+          <p:cNvSpPr txBox="1"/>
+          <p:nvPr/>
+        </p:nvSpPr>
+        <p:spPr>
+          <a:xfrm>
+            <a:off x="748100" y="1871686"/>
+            <a:ext cx="10820400" cy="1411010"/>
+          </a:xfrm>
+          <a:prstGeom prst="rect">
+            <a:avLst/>
+          </a:prstGeom>
+          <a:noFill/>
+          <a:ln w="6350">
+            <a:noFill/>
+          </a:ln>
+        </p:spPr>
+        <p:txBody>
+          <a:bodyPr>
+            <a:noAutofit/>
+          </a:bodyPr>
+          <a:lstStyle>
+            <a:defPPr>
+              <a:defRPr lang="en-US"/>
+            </a:defPPr>
+            <a:lvl1pPr marL="182880" indent="-182880" algn="l" defTabSz="457200" rtl="0" eaLnBrk="1" fontAlgn="b" latinLnBrk="0" hangingPunct="1">
+              <a:lnSpc>
+                <a:spcPct val="100000"/>
+              </a:lnSpc>
+              <a:spcBef>
+                <a:spcPct val="0"/>
+              </a:spcBef>
+              <a:spcAft>
+                <a:spcPts val="300"/>
+              </a:spcAft>
+              <a:buFont typeface="Arial" pitchFamily="34" charset="0"/>
+              <a:buChar char="•"/>
+              <a:defRPr sz="1050" b="0" i="0" u="none" strike="noStrike" kern="1200">
+                <a:solidFill>
+                  <a:srgbClr val="121314"/>
+                </a:solidFill>
+                <a:effectLst/>
+                <a:latin typeface="Avenir Next LT Pro" panose="020B0504020202020204" pitchFamily="34" charset="77"/>
+                <a:ea typeface="+mn-ea"/>
+                <a:cs typeface="Calibri" panose="020F0502020204030204" pitchFamily="34" charset="0"/>
+              </a:defRPr>
+            </a:lvl1pPr>
+            <a:lvl2pPr marL="360000" indent="-180000" algn="l" defTabSz="457200" rtl="0" eaLnBrk="1" latinLnBrk="0" hangingPunct="1">
+              <a:lnSpc>
+                <a:spcPct val="120000"/>
+              </a:lnSpc>
+              <a:spcBef>
+                <a:spcPct val="0"/>
+              </a:spcBef>
+              <a:buFont typeface="Verdana" panose="020B0604030504040204" pitchFamily="34" charset="0"/>
+              <a:buChar char="‒"/>
+              <a:defRPr sz="1400" kern="1200">
+                <a:solidFill>
+                  <a:schemeClr val="accent3">
+                    <a:lumMod val="50000"/>
+                  </a:schemeClr>
+                </a:solidFill>
+                <a:latin typeface="+mn-lt"/>
+                <a:ea typeface="+mn-ea"/>
+                <a:cs typeface="+mn-cs"/>
+              </a:defRPr>
+            </a:lvl2pPr>
+            <a:lvl3pPr marL="540000" indent="-180000" algn="l" defTabSz="457200" rtl="0" eaLnBrk="1" latinLnBrk="0" hangingPunct="1">
+              <a:lnSpc>
+                <a:spcPct val="120000"/>
+              </a:lnSpc>
+              <a:spcBef>
+                <a:spcPct val="0"/>
+              </a:spcBef>
+              <a:buFont typeface="Arial" pitchFamily="34" charset="0"/>
+              <a:buChar char="•"/>
+              <a:defRPr sz="1200" kern="1200">
+                <a:solidFill>
+                  <a:schemeClr val="accent3">
+                    <a:lumMod val="50000"/>
+                  </a:schemeClr>
+                </a:solidFill>
+                <a:latin typeface="+mn-lt"/>
+                <a:ea typeface="+mn-ea"/>
+                <a:cs typeface="+mn-cs"/>
+              </a:defRPr>
+            </a:lvl3pPr>
+            <a:lvl4pPr marL="720000" indent="-180000" algn="l" defTabSz="457200" rtl="0" eaLnBrk="1" latinLnBrk="0" hangingPunct="1">
+              <a:lnSpc>
+                <a:spcPct val="120000"/>
+              </a:lnSpc>
+              <a:spcBef>
+                <a:spcPct val="0"/>
+              </a:spcBef>
+              <a:buFont typeface="Verdana" panose="020B0604030504040204" pitchFamily="34" charset="0"/>
+              <a:buChar char="‒"/>
+              <a:defRPr sz="1100" kern="1200">
+                <a:solidFill>
+                  <a:schemeClr val="accent3">
+                    <a:lumMod val="50000"/>
+                  </a:schemeClr>
+                </a:solidFill>
+                <a:latin typeface="+mn-lt"/>
+                <a:ea typeface="+mn-ea"/>
+                <a:cs typeface="+mn-cs"/>
+              </a:defRPr>
+            </a:lvl4pPr>
+            <a:lvl5pPr marL="900000" indent="-180000" algn="l" defTabSz="457200" rtl="0" eaLnBrk="1" latinLnBrk="0" hangingPunct="1">
+              <a:lnSpc>
+                <a:spcPct val="120000"/>
+              </a:lnSpc>
+              <a:spcBef>
+                <a:spcPct val="0"/>
+              </a:spcBef>
+              <a:buFont typeface="Verdana" panose="020B0604030504040204" pitchFamily="34" charset="0"/>
+              <a:buChar char="›"/>
+              <a:defRPr sz="1100" kern="1200">
+                <a:solidFill>
+                  <a:schemeClr val="accent3">
+                    <a:lumMod val="50000"/>
+                  </a:schemeClr>
+                </a:solidFill>
+                <a:latin typeface="+mn-lt"/>
+                <a:ea typeface="+mn-ea"/>
+                <a:cs typeface="+mn-cs"/>
+              </a:defRPr>
+            </a:lvl5pPr>
+            <a:lvl6pPr marL="2514600" indent="-228600" algn="l" defTabSz="457200" rtl="0" eaLnBrk="1" latinLnBrk="0" hangingPunct="1">
+              <a:spcBef>
+                <a:spcPct val="20000"/>
+              </a:spcBef>
+              <a:buFont typeface="Arial"/>
+              <a:buChar char="•"/>
+              <a:defRPr sz="2000" kern="1200">
+                <a:solidFill>
+                  <a:schemeClr val="tx1"/>
+                </a:solidFill>
+                <a:latin typeface="+mn-lt"/>
+                <a:ea typeface="+mn-ea"/>
+                <a:cs typeface="+mn-cs"/>
+              </a:defRPr>
+            </a:lvl6pPr>
+            <a:lvl7pPr marL="2971800" indent="-228600" algn="l" defTabSz="457200" rtl="0" eaLnBrk="1" latinLnBrk="0" hangingPunct="1">
+              <a:spcBef>
+                <a:spcPct val="20000"/>
+              </a:spcBef>
+              <a:buFont typeface="Arial"/>
+              <a:buChar char="•"/>
+              <a:defRPr sz="2000" kern="1200">
+                <a:solidFill>
+                  <a:schemeClr val="tx1"/>
+                </a:solidFill>
+                <a:latin typeface="+mn-lt"/>
+                <a:ea typeface="+mn-ea"/>
+                <a:cs typeface="+mn-cs"/>
+              </a:defRPr>
+            </a:lvl7pPr>
+            <a:lvl8pPr marL="3429000" indent="-228600" algn="l" defTabSz="457200" rtl="0" eaLnBrk="1" latinLnBrk="0" hangingPunct="1">
+              <a:spcBef>
+                <a:spcPct val="20000"/>
+              </a:spcBef>
+              <a:buFont typeface="Arial"/>
+              <a:buChar char="•"/>
+              <a:defRPr sz="2000" kern="1200">
+                <a:solidFill>
+                  <a:schemeClr val="tx1"/>
+                </a:solidFill>
+                <a:latin typeface="+mn-lt"/>
+                <a:ea typeface="+mn-ea"/>
+                <a:cs typeface="+mn-cs"/>
+              </a:defRPr>
+            </a:lvl8pPr>
+            <a:lvl9pPr marL="3886200" indent="-228600" algn="l" defTabSz="457200" rtl="0" eaLnBrk="1" latinLnBrk="0" hangingPunct="1">
+              <a:spcBef>
+                <a:spcPct val="20000"/>
+              </a:spcBef>
+              <a:buFont typeface="Arial"/>
+              <a:buChar char="•"/>
+              <a:defRPr sz="2000" kern="1200">
+                <a:solidFill>
+                  <a:schemeClr val="tx1"/>
+                </a:solidFill>
+                <a:latin typeface="+mn-lt"/>
+                <a:ea typeface="+mn-ea"/>
+                <a:cs typeface="+mn-cs"/>
+              </a:defRPr>
+            </a:lvl9pPr>
+          </a:lstStyle>
+          <a:p>
+            <a:pPr marL="144000" indent="-144000">
+              <a:spcBef>
+                <a:spcPts val="600"/>
+              </a:spcBef>
+              <a:spcAft>
+                <a:spcPts val="600"/>
+              </a:spcAft>
+              <a:buClr>
+                <a:schemeClr val="accent1"/>
+              </a:buClr>
+            </a:pPr>
+            <a:r>
+              <a:rPr lang="en-US" sz="1800" dirty="0"/>
+              <a:t>Branching &amp; PRs – Protected main/trunk branches with required PR reviews.</a:t>
+            </a:r>
+          </a:p>
+          <a:p>
+            <a:pPr marL="144000" indent="-144000">
+              <a:spcBef>
+                <a:spcPts val="600"/>
+              </a:spcBef>
+              <a:spcAft>
+                <a:spcPts val="600"/>
+              </a:spcAft>
+              <a:buClr>
+                <a:schemeClr val="accent1"/>
+              </a:buClr>
+            </a:pPr>
+            <a:r>
+              <a:rPr lang="en-US" sz="1800" dirty="0"/>
+              <a:t>Branching &amp; PRs – Branch naming aligned to work items (e.g. feature/1234-short-title).</a:t>
+            </a:r>
+          </a:p>
+          <a:p>
+            <a:pPr marL="144000" indent="-144000">
+              <a:spcBef>
+                <a:spcPts val="600"/>
+              </a:spcBef>
+              <a:spcAft>
+                <a:spcPts val="600"/>
+              </a:spcAft>
+              <a:buClr>
+                <a:schemeClr val="accent1"/>
+              </a:buClr>
+            </a:pPr>
+            <a:r>
+              <a:rPr lang="en-US" sz="1800" dirty="0"/>
+              <a:t>Required Checks – Linting and unit tests must pass before merge.</a:t>
+            </a:r>
+          </a:p>
+          <a:p>
+            <a:pPr marL="144000" indent="-144000">
+              <a:spcBef>
+                <a:spcPts val="600"/>
+              </a:spcBef>
+              <a:spcAft>
+                <a:spcPts val="600"/>
+              </a:spcAft>
+              <a:buClr>
+                <a:schemeClr val="accent1"/>
+              </a:buClr>
+            </a:pPr>
+            <a:r>
+              <a:rPr lang="en-US" sz="1800" dirty="0"/>
+              <a:t>Required Checks – Secrets scan, SAST, and IaC checks wired as mandatory checks.</a:t>
+            </a:r>
+          </a:p>
+          <a:p>
+            <a:pPr marL="144000" indent="-144000">
+              <a:spcBef>
+                <a:spcPts val="600"/>
+              </a:spcBef>
+              <a:spcAft>
+                <a:spcPts val="600"/>
+              </a:spcAft>
+              <a:buClr>
+                <a:schemeClr val="accent1"/>
+              </a:buClr>
+            </a:pPr>
+            <a:r>
+              <a:rPr lang="en-US" sz="1800" dirty="0"/>
+              <a:t>Pipelines – Distinct stages: build → test → quality gates → package → deploy.</a:t>
+            </a:r>
+          </a:p>
+          <a:p>
+            <a:pPr marL="144000" indent="-144000">
+              <a:spcBef>
+                <a:spcPts val="600"/>
+              </a:spcBef>
+              <a:spcAft>
+                <a:spcPts val="600"/>
+              </a:spcAft>
+              <a:buClr>
+                <a:schemeClr val="accent1"/>
+              </a:buClr>
+            </a:pPr>
+            <a:r>
+              <a:rPr lang="en-US" sz="1800" dirty="0"/>
+              <a:t>Pipelines – Same pipeline definition across environments; configuration changes, not code.</a:t>
+            </a:r>
+          </a:p>
+          <a:p>
+            <a:pPr marL="144000" indent="-144000">
+              <a:spcBef>
+                <a:spcPts val="600"/>
+              </a:spcBef>
+              <a:spcAft>
+                <a:spcPts val="600"/>
+              </a:spcAft>
+              <a:buClr>
+                <a:schemeClr val="accent1"/>
+              </a:buClr>
+            </a:pPr>
+            <a:r>
+              <a:rPr lang="en-US" sz="1800" dirty="0"/>
+              <a:t>Artefacts – Versioned build artefacts and IaC templates stored centrally.</a:t>
+            </a:r>
+          </a:p>
+          <a:p>
+            <a:pPr marL="144000" indent="-144000">
+              <a:spcBef>
+                <a:spcPts val="600"/>
+              </a:spcBef>
+              <a:spcAft>
+                <a:spcPts val="600"/>
+              </a:spcAft>
+              <a:buClr>
+                <a:schemeClr val="accent1"/>
+              </a:buClr>
+            </a:pPr>
+            <a:r>
+              <a:rPr lang="en-US" sz="1800" dirty="0"/>
+              <a:t>Artefacts – Runbooks and change notes attached to releases.</a:t>
             </a:r>
           </a:p>
         </p:txBody>
       </p:sp>
       <p:sp>
         <p:nvSpPr>
-          <p:cNvPr id="3" name="Picture Placeholder 2"/>
-          <p:cNvSpPr>
-            <a:spLocks noGrp="1"/>
-          </p:cNvSpPr>
-          <p:nvPr>
-            <p:ph type="pic" idx="10" sz="quarter"/>
-          </p:nvPr>
+          <p:cNvPr id="7" name="Rectangle 6" descr="decorative: Rectangle 6">
+            <a:extLst>
+              <a:ext uri="{FF2B5EF4-FFF2-40B4-BE49-F238E27FC236}">
+                <a16:creationId xmlns:a16="http://schemas.microsoft.com/office/drawing/2014/main" id="{38107361-9A9C-7D34-C0C2-D14A9FAC95BC}"/>
+              </a:ext>
+            </a:extLst>
+          </p:cNvPr>
+          <p:cNvSpPr/>
+          <p:nvPr/>
         </p:nvSpPr>
-        <p:spPr/>
+        <p:spPr>
+          <a:xfrm>
+            <a:off x="748100" y="1414182"/>
+            <a:ext cx="2952000" cy="367641"/>
+          </a:xfrm>
+          <a:prstGeom prst="rect">
+            <a:avLst/>
+          </a:prstGeom>
+          <a:solidFill>
+            <a:srgbClr val="FFD366"/>
+          </a:solidFill>
+          <a:ln w="12700" cap="flat" cmpd="sng" algn="ctr">
+            <a:noFill/>
+            <a:prstDash val="solid"/>
+            <a:miter lim="800000"/>
+          </a:ln>
+          <a:effectLst/>
+        </p:spPr>
         <p:txBody>
-          <a:bodyPr/>
-          <a:p/>
-        </p:txBody>
-      </p:sp>
-      <p:sp>
-        <p:nvSpPr>
-          <p:cNvPr id="4" name="Text Placeholder 3"/>
-          <p:cNvSpPr>
-            <a:spLocks noGrp="1"/>
-          </p:cNvSpPr>
-          <p:nvPr>
-            <p:ph type="body" idx="11" sz="quarter"/>
-          </p:nvPr>
-        </p:nvSpPr>
-        <p:spPr/>
-        <p:txBody>
-          <a:bodyPr/>
-          <a:lstStyle/>
+          <a:bodyPr lIns="216000" rtlCol="0" anchor="ctr"/>
+          <a:lstStyle>
+            <a:defPPr>
+              <a:defRPr lang="en-US"/>
+            </a:defPPr>
+            <a:lvl1pPr marL="0" algn="l" defTabSz="914400" rtl="0" eaLnBrk="1" latinLnBrk="0" hangingPunct="1">
+              <a:defRPr sz="1800" kern="1200">
+                <a:solidFill>
+                  <a:schemeClr val="tx1"/>
+                </a:solidFill>
+                <a:latin typeface="+mn-lt"/>
+                <a:ea typeface="+mn-ea"/>
+                <a:cs typeface="+mn-cs"/>
+              </a:defRPr>
+            </a:lvl1pPr>
+            <a:lvl2pPr marL="457200" algn="l" defTabSz="914400" rtl="0" eaLnBrk="1" latinLnBrk="0" hangingPunct="1">
+              <a:defRPr sz="1800" kern="1200">
+                <a:solidFill>
+                  <a:schemeClr val="tx1"/>
+                </a:solidFill>
+                <a:latin typeface="+mn-lt"/>
+                <a:ea typeface="+mn-ea"/>
+                <a:cs typeface="+mn-cs"/>
+              </a:defRPr>
+            </a:lvl2pPr>
+            <a:lvl3pPr marL="914400" algn="l" defTabSz="914400" rtl="0" eaLnBrk="1" latinLnBrk="0" hangingPunct="1">
+              <a:defRPr sz="1800" kern="1200">
+                <a:solidFill>
+                  <a:schemeClr val="tx1"/>
+                </a:solidFill>
+                <a:latin typeface="+mn-lt"/>
+                <a:ea typeface="+mn-ea"/>
+                <a:cs typeface="+mn-cs"/>
+              </a:defRPr>
+            </a:lvl3pPr>
+            <a:lvl4pPr marL="1371600" algn="l" defTabSz="914400" rtl="0" eaLnBrk="1" latinLnBrk="0" hangingPunct="1">
+              <a:defRPr sz="1800" kern="1200">
+                <a:solidFill>
+                  <a:schemeClr val="tx1"/>
+                </a:solidFill>
+                <a:latin typeface="+mn-lt"/>
+                <a:ea typeface="+mn-ea"/>
+                <a:cs typeface="+mn-cs"/>
+              </a:defRPr>
+            </a:lvl4pPr>
+            <a:lvl5pPr marL="1828800" algn="l" defTabSz="914400" rtl="0" eaLnBrk="1" latinLnBrk="0" hangingPunct="1">
+              <a:defRPr sz="1800" kern="1200">
+                <a:solidFill>
+                  <a:schemeClr val="tx1"/>
+                </a:solidFill>
+                <a:latin typeface="+mn-lt"/>
+                <a:ea typeface="+mn-ea"/>
+                <a:cs typeface="+mn-cs"/>
+              </a:defRPr>
+            </a:lvl5pPr>
+            <a:lvl6pPr marL="2286000" algn="l" defTabSz="914400" rtl="0" eaLnBrk="1" latinLnBrk="0" hangingPunct="1">
+              <a:defRPr sz="1800" kern="1200">
+                <a:solidFill>
+                  <a:schemeClr val="tx1"/>
+                </a:solidFill>
+                <a:latin typeface="+mn-lt"/>
+                <a:ea typeface="+mn-ea"/>
+                <a:cs typeface="+mn-cs"/>
+              </a:defRPr>
+            </a:lvl6pPr>
+            <a:lvl7pPr marL="2743200" algn="l" defTabSz="914400" rtl="0" eaLnBrk="1" latinLnBrk="0" hangingPunct="1">
+              <a:defRPr sz="1800" kern="1200">
+                <a:solidFill>
+                  <a:schemeClr val="tx1"/>
+                </a:solidFill>
+                <a:latin typeface="+mn-lt"/>
+                <a:ea typeface="+mn-ea"/>
+                <a:cs typeface="+mn-cs"/>
+              </a:defRPr>
+            </a:lvl7pPr>
+            <a:lvl8pPr marL="3200400" algn="l" defTabSz="914400" rtl="0" eaLnBrk="1" latinLnBrk="0" hangingPunct="1">
+              <a:defRPr sz="1800" kern="1200">
+                <a:solidFill>
+                  <a:schemeClr val="tx1"/>
+                </a:solidFill>
+                <a:latin typeface="+mn-lt"/>
+                <a:ea typeface="+mn-ea"/>
+                <a:cs typeface="+mn-cs"/>
+              </a:defRPr>
+            </a:lvl8pPr>
+            <a:lvl9pPr marL="3657600" algn="l" defTabSz="914400" rtl="0" eaLnBrk="1" latinLnBrk="0" hangingPunct="1">
+              <a:defRPr sz="1800" kern="1200">
+                <a:solidFill>
+                  <a:schemeClr val="tx1"/>
+                </a:solidFill>
+                <a:latin typeface="+mn-lt"/>
+                <a:ea typeface="+mn-ea"/>
+                <a:cs typeface="+mn-cs"/>
+              </a:defRPr>
+            </a:lvl9pPr>
+          </a:lstStyle>
           <a:p>
-            <a:pPr>
-              <a:defRPr sz="2000"/>
-            </a:pPr>
             <a:r>
-              <a:t>Branching &amp; PRs – Protected main/trunk branches with required PR reviews.</a:t>
-            </a:r>
-          </a:p>
-          <a:p>
-            <a:pPr>
-              <a:defRPr sz="2000"/>
-            </a:pPr>
-            <a:r>
-              <a:t>Branching &amp; PRs – Branch naming aligned to work items (e.g. feature/1234-short-title).</a:t>
-            </a:r>
-          </a:p>
-          <a:p>
-            <a:pPr>
-              <a:defRPr sz="2000"/>
-            </a:pPr>
-            <a:r>
-              <a:t>Required Checks – Linting and unit tests must pass before merge.</a:t>
-            </a:r>
-          </a:p>
-          <a:p>
-            <a:pPr>
-              <a:defRPr sz="2000"/>
-            </a:pPr>
-            <a:r>
-              <a:t>Required Checks – Secrets scan, SAST, and IaC checks wired as mandatory checks.</a:t>
-            </a:r>
-          </a:p>
-          <a:p>
-            <a:pPr>
-              <a:defRPr sz="2000"/>
-            </a:pPr>
-            <a:r>
-              <a:t>Pipelines – Distinct stages: build → test → quality gates → package → deploy.</a:t>
-            </a:r>
-          </a:p>
-          <a:p>
-            <a:pPr>
-              <a:defRPr sz="2000"/>
-            </a:pPr>
-            <a:r>
-              <a:t>Pipelines – Same pipeline definition across environments; configuration changes, not code.</a:t>
-            </a:r>
-          </a:p>
-          <a:p>
-            <a:pPr>
-              <a:defRPr sz="2000"/>
-            </a:pPr>
-            <a:r>
-              <a:t>Artefacts – Versioned build artefacts and IaC templates stored centrally.</a:t>
-            </a:r>
-          </a:p>
-          <a:p>
-            <a:pPr>
-              <a:defRPr sz="2000"/>
-            </a:pPr>
-            <a:r>
-              <a:t>Artefacts – Runbooks and change notes attached to releases.</a:t>
+              <a:rPr lang="en-IN" b="1" dirty="0"/>
+              <a:t>Repo &amp; Pipeline</a:t>
             </a:r>
           </a:p>
         </p:txBody>
       </p:sp>
     </p:spTree>
+    <p:custDataLst>
+      <p:tags r:id="rId1"/>
+    </p:custDataLst>
+    <p:extLst>
+      <p:ext uri="{BB962C8B-B14F-4D97-AF65-F5344CB8AC3E}">
+        <p14:creationId xmlns:p14="http://schemas.microsoft.com/office/powerpoint/2010/main" val="728408277"/>
+      </p:ext>
+    </p:extLst>
   </p:cSld>
   <p:clrMapOvr>
     <a:masterClrMapping/>
   </p:clrMapOvr>
+  <p:transition/>
 </p:sld>
 </file>
 
-<file path=ppt/slides/slide14.xml><?xml version="1.0" encoding="utf-8"?>
-<p:sld xmlns:a="http://schemas.openxmlformats.org/drawingml/2006/main" xmlns:p="http://schemas.openxmlformats.org/presentationml/2006/main" xmlns:r="http://schemas.openxmlformats.org/officeDocument/2006/relationships">
+<file path=ppt/slides/slide15.xml><?xml version="1.0" encoding="utf-8"?>
+<p:sld xmlns:a="http://schemas.openxmlformats.org/drawingml/2006/main" xmlns:r="http://schemas.openxmlformats.org/officeDocument/2006/relationships" xmlns:p="http://schemas.openxmlformats.org/presentationml/2006/main">
   <p:cSld>
     <p:spTree>
       <p:nvGrpSpPr>
-        <p:cNvPr id="1" name=""/>
+        <p:cNvPr id="1" name="">
+          <a:extLst>
+            <a:ext uri="{FF2B5EF4-FFF2-40B4-BE49-F238E27FC236}">
+              <a16:creationId xmlns:a16="http://schemas.microsoft.com/office/drawing/2014/main" id="{95D7B153-8F4E-F8E6-30A8-44DA5773A8E4}"/>
+            </a:ext>
+          </a:extLst>
+        </p:cNvPr>
         <p:cNvGrpSpPr/>
         <p:nvPr/>
       </p:nvGrpSpPr>
-      <p:grpSpPr/>
+      <p:grpSpPr>
+        <a:xfrm>
+          <a:off x="0" y="0"/>
+          <a:ext cx="0" cy="0"/>
+          <a:chOff x="0" y="0"/>
+          <a:chExt cx="0" cy="0"/>
+        </a:xfrm>
+      </p:grpSpPr>
       <p:sp>
         <p:nvSpPr>
-          <p:cNvPr id="2" name="Title 1"/>
+          <p:cNvPr id="2" name="Title 1" descr="decorative: Title 1">
+            <a:extLst>
+              <a:ext uri="{FF2B5EF4-FFF2-40B4-BE49-F238E27FC236}">
+                <a16:creationId xmlns:a16="http://schemas.microsoft.com/office/drawing/2014/main" id="{8679CEFD-A587-F9A0-4813-64ADAAF50B1D}"/>
+              </a:ext>
+            </a:extLst>
+          </p:cNvPr>
           <p:cNvSpPr>
             <a:spLocks noGrp="1"/>
           </p:cNvSpPr>
@@ -20451,128 +20318,532 @@
           <a:lstStyle/>
           <a:p>
             <a:r>
-              <a:t>SDLC In Your Repo &amp; Pipeline</a:t>
+              <a:rPr lang="en-US" b="1" dirty="0"/>
+              <a:t>What Good Looks Like</a:t>
+            </a:r>
+            <a:endParaRPr lang="en-IN" b="1" dirty="0"/>
+          </a:p>
+        </p:txBody>
+      </p:sp>
+      <p:sp>
+        <p:nvSpPr>
+          <p:cNvPr id="5" name="Content Placeholder 1" descr="decorative: Content Placeholder 1">
+            <a:extLst>
+              <a:ext uri="{FF2B5EF4-FFF2-40B4-BE49-F238E27FC236}">
+                <a16:creationId xmlns:a16="http://schemas.microsoft.com/office/drawing/2014/main" id="{205A7C0F-CD24-9951-D073-3FE15F645D21}"/>
+              </a:ext>
+            </a:extLst>
+          </p:cNvPr>
+          <p:cNvSpPr txBox="1"/>
+          <p:nvPr/>
+        </p:nvSpPr>
+        <p:spPr>
+          <a:xfrm>
+            <a:off x="748100" y="1871686"/>
+            <a:ext cx="10820400" cy="1411010"/>
+          </a:xfrm>
+          <a:prstGeom prst="rect">
+            <a:avLst/>
+          </a:prstGeom>
+          <a:noFill/>
+          <a:ln w="6350">
+            <a:noFill/>
+          </a:ln>
+        </p:spPr>
+        <p:txBody>
+          <a:bodyPr>
+            <a:noAutofit/>
+          </a:bodyPr>
+          <a:lstStyle>
+            <a:defPPr>
+              <a:defRPr lang="en-US"/>
+            </a:defPPr>
+            <a:lvl1pPr marL="182880" indent="-182880" algn="l" defTabSz="457200" rtl="0" eaLnBrk="1" fontAlgn="b" latinLnBrk="0" hangingPunct="1">
+              <a:lnSpc>
+                <a:spcPct val="100000"/>
+              </a:lnSpc>
+              <a:spcBef>
+                <a:spcPct val="0"/>
+              </a:spcBef>
+              <a:spcAft>
+                <a:spcPts val="300"/>
+              </a:spcAft>
+              <a:buFont typeface="Arial" pitchFamily="34" charset="0"/>
+              <a:buChar char="•"/>
+              <a:defRPr sz="1050" b="0" i="0" u="none" strike="noStrike" kern="1200">
+                <a:solidFill>
+                  <a:srgbClr val="121314"/>
+                </a:solidFill>
+                <a:effectLst/>
+                <a:latin typeface="Avenir Next LT Pro" panose="020B0504020202020204" pitchFamily="34" charset="77"/>
+                <a:ea typeface="+mn-ea"/>
+                <a:cs typeface="Calibri" panose="020F0502020204030204" pitchFamily="34" charset="0"/>
+              </a:defRPr>
+            </a:lvl1pPr>
+            <a:lvl2pPr marL="360000" indent="-180000" algn="l" defTabSz="457200" rtl="0" eaLnBrk="1" latinLnBrk="0" hangingPunct="1">
+              <a:lnSpc>
+                <a:spcPct val="120000"/>
+              </a:lnSpc>
+              <a:spcBef>
+                <a:spcPct val="0"/>
+              </a:spcBef>
+              <a:buFont typeface="Verdana" panose="020B0604030504040204" pitchFamily="34" charset="0"/>
+              <a:buChar char="‒"/>
+              <a:defRPr sz="1400" kern="1200">
+                <a:solidFill>
+                  <a:schemeClr val="accent3">
+                    <a:lumMod val="50000"/>
+                  </a:schemeClr>
+                </a:solidFill>
+                <a:latin typeface="+mn-lt"/>
+                <a:ea typeface="+mn-ea"/>
+                <a:cs typeface="+mn-cs"/>
+              </a:defRPr>
+            </a:lvl2pPr>
+            <a:lvl3pPr marL="540000" indent="-180000" algn="l" defTabSz="457200" rtl="0" eaLnBrk="1" latinLnBrk="0" hangingPunct="1">
+              <a:lnSpc>
+                <a:spcPct val="120000"/>
+              </a:lnSpc>
+              <a:spcBef>
+                <a:spcPct val="0"/>
+              </a:spcBef>
+              <a:buFont typeface="Arial" pitchFamily="34" charset="0"/>
+              <a:buChar char="•"/>
+              <a:defRPr sz="1200" kern="1200">
+                <a:solidFill>
+                  <a:schemeClr val="accent3">
+                    <a:lumMod val="50000"/>
+                  </a:schemeClr>
+                </a:solidFill>
+                <a:latin typeface="+mn-lt"/>
+                <a:ea typeface="+mn-ea"/>
+                <a:cs typeface="+mn-cs"/>
+              </a:defRPr>
+            </a:lvl3pPr>
+            <a:lvl4pPr marL="720000" indent="-180000" algn="l" defTabSz="457200" rtl="0" eaLnBrk="1" latinLnBrk="0" hangingPunct="1">
+              <a:lnSpc>
+                <a:spcPct val="120000"/>
+              </a:lnSpc>
+              <a:spcBef>
+                <a:spcPct val="0"/>
+              </a:spcBef>
+              <a:buFont typeface="Verdana" panose="020B0604030504040204" pitchFamily="34" charset="0"/>
+              <a:buChar char="‒"/>
+              <a:defRPr sz="1100" kern="1200">
+                <a:solidFill>
+                  <a:schemeClr val="accent3">
+                    <a:lumMod val="50000"/>
+                  </a:schemeClr>
+                </a:solidFill>
+                <a:latin typeface="+mn-lt"/>
+                <a:ea typeface="+mn-ea"/>
+                <a:cs typeface="+mn-cs"/>
+              </a:defRPr>
+            </a:lvl4pPr>
+            <a:lvl5pPr marL="900000" indent="-180000" algn="l" defTabSz="457200" rtl="0" eaLnBrk="1" latinLnBrk="0" hangingPunct="1">
+              <a:lnSpc>
+                <a:spcPct val="120000"/>
+              </a:lnSpc>
+              <a:spcBef>
+                <a:spcPct val="0"/>
+              </a:spcBef>
+              <a:buFont typeface="Verdana" panose="020B0604030504040204" pitchFamily="34" charset="0"/>
+              <a:buChar char="›"/>
+              <a:defRPr sz="1100" kern="1200">
+                <a:solidFill>
+                  <a:schemeClr val="accent3">
+                    <a:lumMod val="50000"/>
+                  </a:schemeClr>
+                </a:solidFill>
+                <a:latin typeface="+mn-lt"/>
+                <a:ea typeface="+mn-ea"/>
+                <a:cs typeface="+mn-cs"/>
+              </a:defRPr>
+            </a:lvl5pPr>
+            <a:lvl6pPr marL="2514600" indent="-228600" algn="l" defTabSz="457200" rtl="0" eaLnBrk="1" latinLnBrk="0" hangingPunct="1">
+              <a:spcBef>
+                <a:spcPct val="20000"/>
+              </a:spcBef>
+              <a:buFont typeface="Arial"/>
+              <a:buChar char="•"/>
+              <a:defRPr sz="2000" kern="1200">
+                <a:solidFill>
+                  <a:schemeClr val="tx1"/>
+                </a:solidFill>
+                <a:latin typeface="+mn-lt"/>
+                <a:ea typeface="+mn-ea"/>
+                <a:cs typeface="+mn-cs"/>
+              </a:defRPr>
+            </a:lvl6pPr>
+            <a:lvl7pPr marL="2971800" indent="-228600" algn="l" defTabSz="457200" rtl="0" eaLnBrk="1" latinLnBrk="0" hangingPunct="1">
+              <a:spcBef>
+                <a:spcPct val="20000"/>
+              </a:spcBef>
+              <a:buFont typeface="Arial"/>
+              <a:buChar char="•"/>
+              <a:defRPr sz="2000" kern="1200">
+                <a:solidFill>
+                  <a:schemeClr val="tx1"/>
+                </a:solidFill>
+                <a:latin typeface="+mn-lt"/>
+                <a:ea typeface="+mn-ea"/>
+                <a:cs typeface="+mn-cs"/>
+              </a:defRPr>
+            </a:lvl7pPr>
+            <a:lvl8pPr marL="3429000" indent="-228600" algn="l" defTabSz="457200" rtl="0" eaLnBrk="1" latinLnBrk="0" hangingPunct="1">
+              <a:spcBef>
+                <a:spcPct val="20000"/>
+              </a:spcBef>
+              <a:buFont typeface="Arial"/>
+              <a:buChar char="•"/>
+              <a:defRPr sz="2000" kern="1200">
+                <a:solidFill>
+                  <a:schemeClr val="tx1"/>
+                </a:solidFill>
+                <a:latin typeface="+mn-lt"/>
+                <a:ea typeface="+mn-ea"/>
+                <a:cs typeface="+mn-cs"/>
+              </a:defRPr>
+            </a:lvl8pPr>
+            <a:lvl9pPr marL="3886200" indent="-228600" algn="l" defTabSz="457200" rtl="0" eaLnBrk="1" latinLnBrk="0" hangingPunct="1">
+              <a:spcBef>
+                <a:spcPct val="20000"/>
+              </a:spcBef>
+              <a:buFont typeface="Arial"/>
+              <a:buChar char="•"/>
+              <a:defRPr sz="2000" kern="1200">
+                <a:solidFill>
+                  <a:schemeClr val="tx1"/>
+                </a:solidFill>
+                <a:latin typeface="+mn-lt"/>
+                <a:ea typeface="+mn-ea"/>
+                <a:cs typeface="+mn-cs"/>
+              </a:defRPr>
+            </a:lvl9pPr>
+          </a:lstStyle>
+          <a:p>
+            <a:pPr marL="144000" indent="-144000">
+              <a:spcBef>
+                <a:spcPts val="600"/>
+              </a:spcBef>
+              <a:spcAft>
+                <a:spcPts val="600"/>
+              </a:spcAft>
+              <a:buClr>
+                <a:schemeClr val="accent1"/>
+              </a:buClr>
+            </a:pPr>
+            <a:r>
+              <a:rPr lang="en-US" sz="1800" dirty="0"/>
+              <a:t>Flow &amp; Stability – Lead time for change trending down.</a:t>
+            </a:r>
+          </a:p>
+          <a:p>
+            <a:pPr marL="144000" indent="-144000">
+              <a:spcBef>
+                <a:spcPts val="600"/>
+              </a:spcBef>
+              <a:spcAft>
+                <a:spcPts val="600"/>
+              </a:spcAft>
+              <a:buClr>
+                <a:schemeClr val="accent1"/>
+              </a:buClr>
+            </a:pPr>
+            <a:r>
+              <a:rPr lang="en-US" sz="1800" dirty="0"/>
+              <a:t>Flow &amp; Stability – Deployment frequency increasing where risk allows.</a:t>
+            </a:r>
+          </a:p>
+          <a:p>
+            <a:pPr marL="144000" indent="-144000">
+              <a:spcBef>
+                <a:spcPts val="600"/>
+              </a:spcBef>
+              <a:spcAft>
+                <a:spcPts val="600"/>
+              </a:spcAft>
+              <a:buClr>
+                <a:schemeClr val="accent1"/>
+              </a:buClr>
+            </a:pPr>
+            <a:r>
+              <a:rPr lang="en-US" sz="1800" dirty="0"/>
+              <a:t>Flow &amp; Stability – Change fail rate and MTTR trending down.</a:t>
+            </a:r>
+          </a:p>
+          <a:p>
+            <a:pPr marL="144000" indent="-144000">
+              <a:spcBef>
+                <a:spcPts val="600"/>
+              </a:spcBef>
+              <a:spcAft>
+                <a:spcPts val="600"/>
+              </a:spcAft>
+              <a:buClr>
+                <a:schemeClr val="accent1"/>
+              </a:buClr>
+            </a:pPr>
+            <a:r>
+              <a:rPr lang="en-US" sz="1800" dirty="0"/>
+              <a:t>Quality – Defect escape rate to UAT/production decreasing.</a:t>
+            </a:r>
+          </a:p>
+          <a:p>
+            <a:pPr marL="144000" indent="-144000">
+              <a:spcBef>
+                <a:spcPts val="600"/>
+              </a:spcBef>
+              <a:spcAft>
+                <a:spcPts val="600"/>
+              </a:spcAft>
+              <a:buClr>
+                <a:schemeClr val="accent1"/>
+              </a:buClr>
+            </a:pPr>
+            <a:r>
+              <a:rPr lang="en-US" sz="1800" dirty="0"/>
+              <a:t>Quality – Coverage and linting warnings within agreed thresholds.</a:t>
+            </a:r>
+          </a:p>
+          <a:p>
+            <a:pPr marL="144000" indent="-144000">
+              <a:spcBef>
+                <a:spcPts val="600"/>
+              </a:spcBef>
+              <a:spcAft>
+                <a:spcPts val="600"/>
+              </a:spcAft>
+              <a:buClr>
+                <a:schemeClr val="accent1"/>
+              </a:buClr>
+            </a:pPr>
+            <a:r>
+              <a:rPr lang="en-US" sz="1800" dirty="0"/>
+              <a:t>Governance – Percentage of changes going through the full SDLC gates.</a:t>
+            </a:r>
+          </a:p>
+          <a:p>
+            <a:pPr marL="144000" indent="-144000">
+              <a:spcBef>
+                <a:spcPts val="600"/>
+              </a:spcBef>
+              <a:spcAft>
+                <a:spcPts val="600"/>
+              </a:spcAft>
+              <a:buClr>
+                <a:schemeClr val="accent1"/>
+              </a:buClr>
+            </a:pPr>
+            <a:r>
+              <a:rPr lang="en-US" sz="1800" dirty="0"/>
+              <a:t>Governance – Percentage of infrastructure changes done via IaC, not manual.</a:t>
+            </a:r>
+          </a:p>
+          <a:p>
+            <a:pPr marL="144000" indent="-144000">
+              <a:spcBef>
+                <a:spcPts val="600"/>
+              </a:spcBef>
+              <a:spcAft>
+                <a:spcPts val="600"/>
+              </a:spcAft>
+              <a:buClr>
+                <a:schemeClr val="accent1"/>
+              </a:buClr>
+            </a:pPr>
+            <a:r>
+              <a:rPr lang="en-US" sz="1800" dirty="0"/>
+              <a:t>Champion Role – Use these metrics in team reviews and retros; escalate systemic blockers.</a:t>
             </a:r>
           </a:p>
         </p:txBody>
       </p:sp>
       <p:sp>
         <p:nvSpPr>
-          <p:cNvPr id="3" name="Picture Placeholder 2"/>
-          <p:cNvSpPr>
-            <a:spLocks noGrp="1"/>
-          </p:cNvSpPr>
-          <p:nvPr>
-            <p:ph type="pic" idx="10" sz="quarter"/>
-          </p:nvPr>
+          <p:cNvPr id="7" name="Rectangle 6" descr="decorative: Rectangle 6">
+            <a:extLst>
+              <a:ext uri="{FF2B5EF4-FFF2-40B4-BE49-F238E27FC236}">
+                <a16:creationId xmlns:a16="http://schemas.microsoft.com/office/drawing/2014/main" id="{B4D106BB-04FC-D9BD-EEFF-2562BEBE061E}"/>
+              </a:ext>
+            </a:extLst>
+          </p:cNvPr>
+          <p:cNvSpPr/>
+          <p:nvPr/>
         </p:nvSpPr>
-        <p:spPr/>
+        <p:spPr>
+          <a:xfrm>
+            <a:off x="748100" y="1414182"/>
+            <a:ext cx="2952000" cy="367641"/>
+          </a:xfrm>
+          <a:prstGeom prst="rect">
+            <a:avLst/>
+          </a:prstGeom>
+          <a:solidFill>
+            <a:srgbClr val="FFD366"/>
+          </a:solidFill>
+          <a:ln w="12700" cap="flat" cmpd="sng" algn="ctr">
+            <a:noFill/>
+            <a:prstDash val="solid"/>
+            <a:miter lim="800000"/>
+          </a:ln>
+          <a:effectLst/>
+        </p:spPr>
         <p:txBody>
-          <a:bodyPr/>
-          <a:p/>
-        </p:txBody>
-      </p:sp>
-      <p:sp>
-        <p:nvSpPr>
-          <p:cNvPr id="4" name="Text Placeholder 3"/>
-          <p:cNvSpPr>
-            <a:spLocks noGrp="1"/>
-          </p:cNvSpPr>
-          <p:nvPr>
-            <p:ph type="body" idx="11" sz="quarter"/>
-          </p:nvPr>
-        </p:nvSpPr>
-        <p:spPr/>
-        <p:txBody>
-          <a:bodyPr/>
-          <a:lstStyle/>
+          <a:bodyPr lIns="216000" rtlCol="0" anchor="ctr"/>
+          <a:lstStyle>
+            <a:defPPr>
+              <a:defRPr lang="en-US"/>
+            </a:defPPr>
+            <a:lvl1pPr marL="0" algn="l" defTabSz="914400" rtl="0" eaLnBrk="1" latinLnBrk="0" hangingPunct="1">
+              <a:defRPr sz="1800" kern="1200">
+                <a:solidFill>
+                  <a:schemeClr val="tx1"/>
+                </a:solidFill>
+                <a:latin typeface="+mn-lt"/>
+                <a:ea typeface="+mn-ea"/>
+                <a:cs typeface="+mn-cs"/>
+              </a:defRPr>
+            </a:lvl1pPr>
+            <a:lvl2pPr marL="457200" algn="l" defTabSz="914400" rtl="0" eaLnBrk="1" latinLnBrk="0" hangingPunct="1">
+              <a:defRPr sz="1800" kern="1200">
+                <a:solidFill>
+                  <a:schemeClr val="tx1"/>
+                </a:solidFill>
+                <a:latin typeface="+mn-lt"/>
+                <a:ea typeface="+mn-ea"/>
+                <a:cs typeface="+mn-cs"/>
+              </a:defRPr>
+            </a:lvl2pPr>
+            <a:lvl3pPr marL="914400" algn="l" defTabSz="914400" rtl="0" eaLnBrk="1" latinLnBrk="0" hangingPunct="1">
+              <a:defRPr sz="1800" kern="1200">
+                <a:solidFill>
+                  <a:schemeClr val="tx1"/>
+                </a:solidFill>
+                <a:latin typeface="+mn-lt"/>
+                <a:ea typeface="+mn-ea"/>
+                <a:cs typeface="+mn-cs"/>
+              </a:defRPr>
+            </a:lvl3pPr>
+            <a:lvl4pPr marL="1371600" algn="l" defTabSz="914400" rtl="0" eaLnBrk="1" latinLnBrk="0" hangingPunct="1">
+              <a:defRPr sz="1800" kern="1200">
+                <a:solidFill>
+                  <a:schemeClr val="tx1"/>
+                </a:solidFill>
+                <a:latin typeface="+mn-lt"/>
+                <a:ea typeface="+mn-ea"/>
+                <a:cs typeface="+mn-cs"/>
+              </a:defRPr>
+            </a:lvl4pPr>
+            <a:lvl5pPr marL="1828800" algn="l" defTabSz="914400" rtl="0" eaLnBrk="1" latinLnBrk="0" hangingPunct="1">
+              <a:defRPr sz="1800" kern="1200">
+                <a:solidFill>
+                  <a:schemeClr val="tx1"/>
+                </a:solidFill>
+                <a:latin typeface="+mn-lt"/>
+                <a:ea typeface="+mn-ea"/>
+                <a:cs typeface="+mn-cs"/>
+              </a:defRPr>
+            </a:lvl5pPr>
+            <a:lvl6pPr marL="2286000" algn="l" defTabSz="914400" rtl="0" eaLnBrk="1" latinLnBrk="0" hangingPunct="1">
+              <a:defRPr sz="1800" kern="1200">
+                <a:solidFill>
+                  <a:schemeClr val="tx1"/>
+                </a:solidFill>
+                <a:latin typeface="+mn-lt"/>
+                <a:ea typeface="+mn-ea"/>
+                <a:cs typeface="+mn-cs"/>
+              </a:defRPr>
+            </a:lvl6pPr>
+            <a:lvl7pPr marL="2743200" algn="l" defTabSz="914400" rtl="0" eaLnBrk="1" latinLnBrk="0" hangingPunct="1">
+              <a:defRPr sz="1800" kern="1200">
+                <a:solidFill>
+                  <a:schemeClr val="tx1"/>
+                </a:solidFill>
+                <a:latin typeface="+mn-lt"/>
+                <a:ea typeface="+mn-ea"/>
+                <a:cs typeface="+mn-cs"/>
+              </a:defRPr>
+            </a:lvl7pPr>
+            <a:lvl8pPr marL="3200400" algn="l" defTabSz="914400" rtl="0" eaLnBrk="1" latinLnBrk="0" hangingPunct="1">
+              <a:defRPr sz="1800" kern="1200">
+                <a:solidFill>
+                  <a:schemeClr val="tx1"/>
+                </a:solidFill>
+                <a:latin typeface="+mn-lt"/>
+                <a:ea typeface="+mn-ea"/>
+                <a:cs typeface="+mn-cs"/>
+              </a:defRPr>
+            </a:lvl8pPr>
+            <a:lvl9pPr marL="3657600" algn="l" defTabSz="914400" rtl="0" eaLnBrk="1" latinLnBrk="0" hangingPunct="1">
+              <a:defRPr sz="1800" kern="1200">
+                <a:solidFill>
+                  <a:schemeClr val="tx1"/>
+                </a:solidFill>
+                <a:latin typeface="+mn-lt"/>
+                <a:ea typeface="+mn-ea"/>
+                <a:cs typeface="+mn-cs"/>
+              </a:defRPr>
+            </a:lvl9pPr>
+          </a:lstStyle>
           <a:p>
-            <a:pPr>
-              <a:defRPr sz="2000"/>
-            </a:pPr>
             <a:r>
-              <a:t>Branching &amp; PRs – Protected main/trunk branches with required PR reviews.</a:t>
+              <a:rPr lang="en-US" b="1" dirty="0"/>
+              <a:t>Metrics</a:t>
             </a:r>
-          </a:p>
-          <a:p>
-            <a:pPr>
-              <a:defRPr sz="2000"/>
-            </a:pPr>
-            <a:r>
-              <a:t>Branching &amp; PRs – Branch naming aligned to work items (e.g. feature/1234-short-title).</a:t>
-            </a:r>
-          </a:p>
-          <a:p>
-            <a:pPr>
-              <a:defRPr sz="2000"/>
-            </a:pPr>
-            <a:r>
-              <a:t>Required Checks – Linting and unit tests must pass before merge.</a:t>
-            </a:r>
-          </a:p>
-          <a:p>
-            <a:pPr>
-              <a:defRPr sz="2000"/>
-            </a:pPr>
-            <a:r>
-              <a:t>Required Checks – Secrets scan, SAST, and IaC checks wired as mandatory checks.</a:t>
-            </a:r>
-          </a:p>
-          <a:p>
-            <a:pPr>
-              <a:defRPr sz="2000"/>
-            </a:pPr>
-            <a:r>
-              <a:t>Pipelines – Distinct stages: build → test → quality gates → package → deploy.</a:t>
-            </a:r>
-          </a:p>
-          <a:p>
-            <a:pPr>
-              <a:defRPr sz="2000"/>
-            </a:pPr>
-            <a:r>
-              <a:t>Pipelines – Same pipeline definition across environments; configuration changes, not code.</a:t>
-            </a:r>
-          </a:p>
-          <a:p>
-            <a:pPr>
-              <a:defRPr sz="2000"/>
-            </a:pPr>
-            <a:r>
-              <a:t>Artefacts – Versioned build artefacts and IaC templates stored centrally.</a:t>
-            </a:r>
-          </a:p>
-          <a:p>
-            <a:pPr>
-              <a:defRPr sz="2000"/>
-            </a:pPr>
-            <a:r>
-              <a:t>Artefacts – Runbooks and change notes attached to releases.</a:t>
-            </a:r>
+            <a:endParaRPr lang="en-IN" b="1" dirty="0"/>
           </a:p>
         </p:txBody>
       </p:sp>
     </p:spTree>
+    <p:custDataLst>
+      <p:tags r:id="rId1"/>
+    </p:custDataLst>
+    <p:extLst>
+      <p:ext uri="{BB962C8B-B14F-4D97-AF65-F5344CB8AC3E}">
+        <p14:creationId xmlns:p14="http://schemas.microsoft.com/office/powerpoint/2010/main" val="797160826"/>
+      </p:ext>
+    </p:extLst>
   </p:cSld>
   <p:clrMapOvr>
     <a:masterClrMapping/>
   </p:clrMapOvr>
+  <p:transition/>
 </p:sld>
 </file>
 
-<file path=ppt/slides/slide15.xml><?xml version="1.0" encoding="utf-8"?>
-<p:sld xmlns:a="http://schemas.openxmlformats.org/drawingml/2006/main" xmlns:p="http://schemas.openxmlformats.org/presentationml/2006/main" xmlns:r="http://schemas.openxmlformats.org/officeDocument/2006/relationships">
+<file path=ppt/slides/slide16.xml><?xml version="1.0" encoding="utf-8"?>
+<p:sld xmlns:a="http://schemas.openxmlformats.org/drawingml/2006/main" xmlns:r="http://schemas.openxmlformats.org/officeDocument/2006/relationships" xmlns:p="http://schemas.openxmlformats.org/presentationml/2006/main">
   <p:cSld>
     <p:spTree>
       <p:nvGrpSpPr>
-        <p:cNvPr id="1" name=""/>
+        <p:cNvPr id="1" name="">
+          <a:extLst>
+            <a:ext uri="{FF2B5EF4-FFF2-40B4-BE49-F238E27FC236}">
+              <a16:creationId xmlns:a16="http://schemas.microsoft.com/office/drawing/2014/main" id="{3CAAD701-6140-8AC9-1671-276CBCD70AA4}"/>
+            </a:ext>
+          </a:extLst>
+        </p:cNvPr>
         <p:cNvGrpSpPr/>
         <p:nvPr/>
       </p:nvGrpSpPr>
-      <p:grpSpPr/>
+      <p:grpSpPr>
+        <a:xfrm>
+          <a:off x="0" y="0"/>
+          <a:ext cx="0" cy="0"/>
+          <a:chOff x="0" y="0"/>
+          <a:chExt cx="0" cy="0"/>
+        </a:xfrm>
+      </p:grpSpPr>
       <p:sp>
         <p:nvSpPr>
-          <p:cNvPr id="2" name="Title 1"/>
+          <p:cNvPr id="2" name="Title 1" descr="decorative: Title 1">
+            <a:extLst>
+              <a:ext uri="{FF2B5EF4-FFF2-40B4-BE49-F238E27FC236}">
+                <a16:creationId xmlns:a16="http://schemas.microsoft.com/office/drawing/2014/main" id="{3F3C32E1-8B12-DB62-9E2E-83546CB0EE72}"/>
+              </a:ext>
+            </a:extLst>
+          </p:cNvPr>
           <p:cNvSpPr>
             <a:spLocks noGrp="1"/>
           </p:cNvSpPr>
@@ -20586,128 +20857,532 @@
           <a:lstStyle/>
           <a:p>
             <a:r>
-              <a:t>What Good Looks Like (Metrics)</a:t>
+              <a:rPr lang="en-US" b="1" dirty="0"/>
+              <a:t>Common Things To Watch For</a:t>
+            </a:r>
+            <a:endParaRPr lang="en-IN" b="1" dirty="0"/>
+          </a:p>
+        </p:txBody>
+      </p:sp>
+      <p:sp>
+        <p:nvSpPr>
+          <p:cNvPr id="5" name="Content Placeholder 1" descr="decorative: Content Placeholder 1">
+            <a:extLst>
+              <a:ext uri="{FF2B5EF4-FFF2-40B4-BE49-F238E27FC236}">
+                <a16:creationId xmlns:a16="http://schemas.microsoft.com/office/drawing/2014/main" id="{727E6CF8-A018-6904-55F4-50E2165FFC0D}"/>
+              </a:ext>
+            </a:extLst>
+          </p:cNvPr>
+          <p:cNvSpPr txBox="1"/>
+          <p:nvPr/>
+        </p:nvSpPr>
+        <p:spPr>
+          <a:xfrm>
+            <a:off x="748100" y="1871686"/>
+            <a:ext cx="10820400" cy="1411010"/>
+          </a:xfrm>
+          <a:prstGeom prst="rect">
+            <a:avLst/>
+          </a:prstGeom>
+          <a:noFill/>
+          <a:ln w="6350">
+            <a:noFill/>
+          </a:ln>
+        </p:spPr>
+        <p:txBody>
+          <a:bodyPr>
+            <a:noAutofit/>
+          </a:bodyPr>
+          <a:lstStyle>
+            <a:defPPr>
+              <a:defRPr lang="en-US"/>
+            </a:defPPr>
+            <a:lvl1pPr marL="182880" indent="-182880" algn="l" defTabSz="457200" rtl="0" eaLnBrk="1" fontAlgn="b" latinLnBrk="0" hangingPunct="1">
+              <a:lnSpc>
+                <a:spcPct val="100000"/>
+              </a:lnSpc>
+              <a:spcBef>
+                <a:spcPct val="0"/>
+              </a:spcBef>
+              <a:spcAft>
+                <a:spcPts val="300"/>
+              </a:spcAft>
+              <a:buFont typeface="Arial" pitchFamily="34" charset="0"/>
+              <a:buChar char="•"/>
+              <a:defRPr sz="1050" b="0" i="0" u="none" strike="noStrike" kern="1200">
+                <a:solidFill>
+                  <a:srgbClr val="121314"/>
+                </a:solidFill>
+                <a:effectLst/>
+                <a:latin typeface="Avenir Next LT Pro" panose="020B0504020202020204" pitchFamily="34" charset="77"/>
+                <a:ea typeface="+mn-ea"/>
+                <a:cs typeface="Calibri" panose="020F0502020204030204" pitchFamily="34" charset="0"/>
+              </a:defRPr>
+            </a:lvl1pPr>
+            <a:lvl2pPr marL="360000" indent="-180000" algn="l" defTabSz="457200" rtl="0" eaLnBrk="1" latinLnBrk="0" hangingPunct="1">
+              <a:lnSpc>
+                <a:spcPct val="120000"/>
+              </a:lnSpc>
+              <a:spcBef>
+                <a:spcPct val="0"/>
+              </a:spcBef>
+              <a:buFont typeface="Verdana" panose="020B0604030504040204" pitchFamily="34" charset="0"/>
+              <a:buChar char="‒"/>
+              <a:defRPr sz="1400" kern="1200">
+                <a:solidFill>
+                  <a:schemeClr val="accent3">
+                    <a:lumMod val="50000"/>
+                  </a:schemeClr>
+                </a:solidFill>
+                <a:latin typeface="+mn-lt"/>
+                <a:ea typeface="+mn-ea"/>
+                <a:cs typeface="+mn-cs"/>
+              </a:defRPr>
+            </a:lvl2pPr>
+            <a:lvl3pPr marL="540000" indent="-180000" algn="l" defTabSz="457200" rtl="0" eaLnBrk="1" latinLnBrk="0" hangingPunct="1">
+              <a:lnSpc>
+                <a:spcPct val="120000"/>
+              </a:lnSpc>
+              <a:spcBef>
+                <a:spcPct val="0"/>
+              </a:spcBef>
+              <a:buFont typeface="Arial" pitchFamily="34" charset="0"/>
+              <a:buChar char="•"/>
+              <a:defRPr sz="1200" kern="1200">
+                <a:solidFill>
+                  <a:schemeClr val="accent3">
+                    <a:lumMod val="50000"/>
+                  </a:schemeClr>
+                </a:solidFill>
+                <a:latin typeface="+mn-lt"/>
+                <a:ea typeface="+mn-ea"/>
+                <a:cs typeface="+mn-cs"/>
+              </a:defRPr>
+            </a:lvl3pPr>
+            <a:lvl4pPr marL="720000" indent="-180000" algn="l" defTabSz="457200" rtl="0" eaLnBrk="1" latinLnBrk="0" hangingPunct="1">
+              <a:lnSpc>
+                <a:spcPct val="120000"/>
+              </a:lnSpc>
+              <a:spcBef>
+                <a:spcPct val="0"/>
+              </a:spcBef>
+              <a:buFont typeface="Verdana" panose="020B0604030504040204" pitchFamily="34" charset="0"/>
+              <a:buChar char="‒"/>
+              <a:defRPr sz="1100" kern="1200">
+                <a:solidFill>
+                  <a:schemeClr val="accent3">
+                    <a:lumMod val="50000"/>
+                  </a:schemeClr>
+                </a:solidFill>
+                <a:latin typeface="+mn-lt"/>
+                <a:ea typeface="+mn-ea"/>
+                <a:cs typeface="+mn-cs"/>
+              </a:defRPr>
+            </a:lvl4pPr>
+            <a:lvl5pPr marL="900000" indent="-180000" algn="l" defTabSz="457200" rtl="0" eaLnBrk="1" latinLnBrk="0" hangingPunct="1">
+              <a:lnSpc>
+                <a:spcPct val="120000"/>
+              </a:lnSpc>
+              <a:spcBef>
+                <a:spcPct val="0"/>
+              </a:spcBef>
+              <a:buFont typeface="Verdana" panose="020B0604030504040204" pitchFamily="34" charset="0"/>
+              <a:buChar char="›"/>
+              <a:defRPr sz="1100" kern="1200">
+                <a:solidFill>
+                  <a:schemeClr val="accent3">
+                    <a:lumMod val="50000"/>
+                  </a:schemeClr>
+                </a:solidFill>
+                <a:latin typeface="+mn-lt"/>
+                <a:ea typeface="+mn-ea"/>
+                <a:cs typeface="+mn-cs"/>
+              </a:defRPr>
+            </a:lvl5pPr>
+            <a:lvl6pPr marL="2514600" indent="-228600" algn="l" defTabSz="457200" rtl="0" eaLnBrk="1" latinLnBrk="0" hangingPunct="1">
+              <a:spcBef>
+                <a:spcPct val="20000"/>
+              </a:spcBef>
+              <a:buFont typeface="Arial"/>
+              <a:buChar char="•"/>
+              <a:defRPr sz="2000" kern="1200">
+                <a:solidFill>
+                  <a:schemeClr val="tx1"/>
+                </a:solidFill>
+                <a:latin typeface="+mn-lt"/>
+                <a:ea typeface="+mn-ea"/>
+                <a:cs typeface="+mn-cs"/>
+              </a:defRPr>
+            </a:lvl6pPr>
+            <a:lvl7pPr marL="2971800" indent="-228600" algn="l" defTabSz="457200" rtl="0" eaLnBrk="1" latinLnBrk="0" hangingPunct="1">
+              <a:spcBef>
+                <a:spcPct val="20000"/>
+              </a:spcBef>
+              <a:buFont typeface="Arial"/>
+              <a:buChar char="•"/>
+              <a:defRPr sz="2000" kern="1200">
+                <a:solidFill>
+                  <a:schemeClr val="tx1"/>
+                </a:solidFill>
+                <a:latin typeface="+mn-lt"/>
+                <a:ea typeface="+mn-ea"/>
+                <a:cs typeface="+mn-cs"/>
+              </a:defRPr>
+            </a:lvl7pPr>
+            <a:lvl8pPr marL="3429000" indent="-228600" algn="l" defTabSz="457200" rtl="0" eaLnBrk="1" latinLnBrk="0" hangingPunct="1">
+              <a:spcBef>
+                <a:spcPct val="20000"/>
+              </a:spcBef>
+              <a:buFont typeface="Arial"/>
+              <a:buChar char="•"/>
+              <a:defRPr sz="2000" kern="1200">
+                <a:solidFill>
+                  <a:schemeClr val="tx1"/>
+                </a:solidFill>
+                <a:latin typeface="+mn-lt"/>
+                <a:ea typeface="+mn-ea"/>
+                <a:cs typeface="+mn-cs"/>
+              </a:defRPr>
+            </a:lvl8pPr>
+            <a:lvl9pPr marL="3886200" indent="-228600" algn="l" defTabSz="457200" rtl="0" eaLnBrk="1" latinLnBrk="0" hangingPunct="1">
+              <a:spcBef>
+                <a:spcPct val="20000"/>
+              </a:spcBef>
+              <a:buFont typeface="Arial"/>
+              <a:buChar char="•"/>
+              <a:defRPr sz="2000" kern="1200">
+                <a:solidFill>
+                  <a:schemeClr val="tx1"/>
+                </a:solidFill>
+                <a:latin typeface="+mn-lt"/>
+                <a:ea typeface="+mn-ea"/>
+                <a:cs typeface="+mn-cs"/>
+              </a:defRPr>
+            </a:lvl9pPr>
+          </a:lstStyle>
+          <a:p>
+            <a:pPr marL="144000" indent="-144000">
+              <a:spcBef>
+                <a:spcPts val="600"/>
+              </a:spcBef>
+              <a:spcAft>
+                <a:spcPts val="600"/>
+              </a:spcAft>
+              <a:buClr>
+                <a:schemeClr val="accent1"/>
+              </a:buClr>
+            </a:pPr>
+            <a:r>
+              <a:rPr lang="en-US" sz="1800" dirty="0"/>
+              <a:t>Process Bypass – 'Quick fixes' merged directly to main without reviews or tests.</a:t>
+            </a:r>
+          </a:p>
+          <a:p>
+            <a:pPr marL="144000" indent="-144000">
+              <a:spcBef>
+                <a:spcPts val="600"/>
+              </a:spcBef>
+              <a:spcAft>
+                <a:spcPts val="600"/>
+              </a:spcAft>
+              <a:buClr>
+                <a:schemeClr val="accent1"/>
+              </a:buClr>
+            </a:pPr>
+            <a:r>
+              <a:rPr lang="en-US" sz="1800" dirty="0"/>
+              <a:t>Process Bypass – Manual environment changes never back-ported into IaC.</a:t>
+            </a:r>
+          </a:p>
+          <a:p>
+            <a:pPr marL="144000" indent="-144000">
+              <a:spcBef>
+                <a:spcPts val="600"/>
+              </a:spcBef>
+              <a:spcAft>
+                <a:spcPts val="600"/>
+              </a:spcAft>
+              <a:buClr>
+                <a:schemeClr val="accent1"/>
+              </a:buClr>
+            </a:pPr>
+            <a:r>
+              <a:rPr lang="en-US" sz="1800" dirty="0"/>
+              <a:t>Fake Quality Gates – Rubber-stamp reviews with no meaningful comments.</a:t>
+            </a:r>
+          </a:p>
+          <a:p>
+            <a:pPr marL="144000" indent="-144000">
+              <a:spcBef>
+                <a:spcPts val="600"/>
+              </a:spcBef>
+              <a:spcAft>
+                <a:spcPts val="600"/>
+              </a:spcAft>
+              <a:buClr>
+                <a:schemeClr val="accent1"/>
+              </a:buClr>
+            </a:pPr>
+            <a:r>
+              <a:rPr lang="en-US" sz="1800" dirty="0"/>
+              <a:t>Fake Quality Gates – Linting/tests configured but routinely ignored or overridden.</a:t>
+            </a:r>
+          </a:p>
+          <a:p>
+            <a:pPr marL="144000" indent="-144000">
+              <a:spcBef>
+                <a:spcPts val="600"/>
+              </a:spcBef>
+              <a:spcAft>
+                <a:spcPts val="600"/>
+              </a:spcAft>
+              <a:buClr>
+                <a:schemeClr val="accent1"/>
+              </a:buClr>
+            </a:pPr>
+            <a:r>
+              <a:rPr lang="en-US" sz="1800" dirty="0"/>
+              <a:t>Hero Dependency – One person who 'just knows' how to deploy or fix issues.</a:t>
+            </a:r>
+          </a:p>
+          <a:p>
+            <a:pPr marL="144000" indent="-144000">
+              <a:spcBef>
+                <a:spcPts val="600"/>
+              </a:spcBef>
+              <a:spcAft>
+                <a:spcPts val="600"/>
+              </a:spcAft>
+              <a:buClr>
+                <a:schemeClr val="accent1"/>
+              </a:buClr>
+            </a:pPr>
+            <a:r>
+              <a:rPr lang="en-US" sz="1800" dirty="0"/>
+              <a:t>Hero Dependency – Key knowledge not captured in runbooks, ADRs, or comments.</a:t>
+            </a:r>
+          </a:p>
+          <a:p>
+            <a:pPr marL="144000" indent="-144000">
+              <a:spcBef>
+                <a:spcPts val="600"/>
+              </a:spcBef>
+              <a:spcAft>
+                <a:spcPts val="600"/>
+              </a:spcAft>
+              <a:buClr>
+                <a:schemeClr val="accent1"/>
+              </a:buClr>
+            </a:pPr>
+            <a:r>
+              <a:rPr lang="en-US" sz="1800" dirty="0"/>
+              <a:t>Over-bureaucracy – Gates that add friction but no real risk reduction.</a:t>
+            </a:r>
+          </a:p>
+          <a:p>
+            <a:pPr marL="144000" indent="-144000">
+              <a:spcBef>
+                <a:spcPts val="600"/>
+              </a:spcBef>
+              <a:spcAft>
+                <a:spcPts val="600"/>
+              </a:spcAft>
+              <a:buClr>
+                <a:schemeClr val="accent1"/>
+              </a:buClr>
+            </a:pPr>
+            <a:r>
+              <a:rPr lang="en-US" sz="1800" dirty="0"/>
+              <a:t>Champion Response – Call these out early and propose automation/simplification.</a:t>
             </a:r>
           </a:p>
         </p:txBody>
       </p:sp>
       <p:sp>
         <p:nvSpPr>
-          <p:cNvPr id="3" name="Picture Placeholder 2"/>
-          <p:cNvSpPr>
-            <a:spLocks noGrp="1"/>
-          </p:cNvSpPr>
-          <p:nvPr>
-            <p:ph type="pic" idx="10" sz="quarter"/>
-          </p:nvPr>
+          <p:cNvPr id="7" name="Rectangle 6" descr="decorative: Rectangle 6">
+            <a:extLst>
+              <a:ext uri="{FF2B5EF4-FFF2-40B4-BE49-F238E27FC236}">
+                <a16:creationId xmlns:a16="http://schemas.microsoft.com/office/drawing/2014/main" id="{8769C36C-5359-1789-D145-5BC6C11F839C}"/>
+              </a:ext>
+            </a:extLst>
+          </p:cNvPr>
+          <p:cNvSpPr/>
+          <p:nvPr/>
         </p:nvSpPr>
-        <p:spPr/>
+        <p:spPr>
+          <a:xfrm>
+            <a:off x="748100" y="1414182"/>
+            <a:ext cx="2952000" cy="367641"/>
+          </a:xfrm>
+          <a:prstGeom prst="rect">
+            <a:avLst/>
+          </a:prstGeom>
+          <a:solidFill>
+            <a:srgbClr val="FFD366"/>
+          </a:solidFill>
+          <a:ln w="12700" cap="flat" cmpd="sng" algn="ctr">
+            <a:noFill/>
+            <a:prstDash val="solid"/>
+            <a:miter lim="800000"/>
+          </a:ln>
+          <a:effectLst/>
+        </p:spPr>
         <p:txBody>
-          <a:bodyPr/>
-          <a:p/>
-        </p:txBody>
-      </p:sp>
-      <p:sp>
-        <p:nvSpPr>
-          <p:cNvPr id="4" name="Text Placeholder 3"/>
-          <p:cNvSpPr>
-            <a:spLocks noGrp="1"/>
-          </p:cNvSpPr>
-          <p:nvPr>
-            <p:ph type="body" idx="11" sz="quarter"/>
-          </p:nvPr>
-        </p:nvSpPr>
-        <p:spPr/>
-        <p:txBody>
-          <a:bodyPr/>
-          <a:lstStyle/>
+          <a:bodyPr lIns="216000" rtlCol="0" anchor="ctr"/>
+          <a:lstStyle>
+            <a:defPPr>
+              <a:defRPr lang="en-US"/>
+            </a:defPPr>
+            <a:lvl1pPr marL="0" algn="l" defTabSz="914400" rtl="0" eaLnBrk="1" latinLnBrk="0" hangingPunct="1">
+              <a:defRPr sz="1800" kern="1200">
+                <a:solidFill>
+                  <a:schemeClr val="tx1"/>
+                </a:solidFill>
+                <a:latin typeface="+mn-lt"/>
+                <a:ea typeface="+mn-ea"/>
+                <a:cs typeface="+mn-cs"/>
+              </a:defRPr>
+            </a:lvl1pPr>
+            <a:lvl2pPr marL="457200" algn="l" defTabSz="914400" rtl="0" eaLnBrk="1" latinLnBrk="0" hangingPunct="1">
+              <a:defRPr sz="1800" kern="1200">
+                <a:solidFill>
+                  <a:schemeClr val="tx1"/>
+                </a:solidFill>
+                <a:latin typeface="+mn-lt"/>
+                <a:ea typeface="+mn-ea"/>
+                <a:cs typeface="+mn-cs"/>
+              </a:defRPr>
+            </a:lvl2pPr>
+            <a:lvl3pPr marL="914400" algn="l" defTabSz="914400" rtl="0" eaLnBrk="1" latinLnBrk="0" hangingPunct="1">
+              <a:defRPr sz="1800" kern="1200">
+                <a:solidFill>
+                  <a:schemeClr val="tx1"/>
+                </a:solidFill>
+                <a:latin typeface="+mn-lt"/>
+                <a:ea typeface="+mn-ea"/>
+                <a:cs typeface="+mn-cs"/>
+              </a:defRPr>
+            </a:lvl3pPr>
+            <a:lvl4pPr marL="1371600" algn="l" defTabSz="914400" rtl="0" eaLnBrk="1" latinLnBrk="0" hangingPunct="1">
+              <a:defRPr sz="1800" kern="1200">
+                <a:solidFill>
+                  <a:schemeClr val="tx1"/>
+                </a:solidFill>
+                <a:latin typeface="+mn-lt"/>
+                <a:ea typeface="+mn-ea"/>
+                <a:cs typeface="+mn-cs"/>
+              </a:defRPr>
+            </a:lvl4pPr>
+            <a:lvl5pPr marL="1828800" algn="l" defTabSz="914400" rtl="0" eaLnBrk="1" latinLnBrk="0" hangingPunct="1">
+              <a:defRPr sz="1800" kern="1200">
+                <a:solidFill>
+                  <a:schemeClr val="tx1"/>
+                </a:solidFill>
+                <a:latin typeface="+mn-lt"/>
+                <a:ea typeface="+mn-ea"/>
+                <a:cs typeface="+mn-cs"/>
+              </a:defRPr>
+            </a:lvl5pPr>
+            <a:lvl6pPr marL="2286000" algn="l" defTabSz="914400" rtl="0" eaLnBrk="1" latinLnBrk="0" hangingPunct="1">
+              <a:defRPr sz="1800" kern="1200">
+                <a:solidFill>
+                  <a:schemeClr val="tx1"/>
+                </a:solidFill>
+                <a:latin typeface="+mn-lt"/>
+                <a:ea typeface="+mn-ea"/>
+                <a:cs typeface="+mn-cs"/>
+              </a:defRPr>
+            </a:lvl6pPr>
+            <a:lvl7pPr marL="2743200" algn="l" defTabSz="914400" rtl="0" eaLnBrk="1" latinLnBrk="0" hangingPunct="1">
+              <a:defRPr sz="1800" kern="1200">
+                <a:solidFill>
+                  <a:schemeClr val="tx1"/>
+                </a:solidFill>
+                <a:latin typeface="+mn-lt"/>
+                <a:ea typeface="+mn-ea"/>
+                <a:cs typeface="+mn-cs"/>
+              </a:defRPr>
+            </a:lvl7pPr>
+            <a:lvl8pPr marL="3200400" algn="l" defTabSz="914400" rtl="0" eaLnBrk="1" latinLnBrk="0" hangingPunct="1">
+              <a:defRPr sz="1800" kern="1200">
+                <a:solidFill>
+                  <a:schemeClr val="tx1"/>
+                </a:solidFill>
+                <a:latin typeface="+mn-lt"/>
+                <a:ea typeface="+mn-ea"/>
+                <a:cs typeface="+mn-cs"/>
+              </a:defRPr>
+            </a:lvl8pPr>
+            <a:lvl9pPr marL="3657600" algn="l" defTabSz="914400" rtl="0" eaLnBrk="1" latinLnBrk="0" hangingPunct="1">
+              <a:defRPr sz="1800" kern="1200">
+                <a:solidFill>
+                  <a:schemeClr val="tx1"/>
+                </a:solidFill>
+                <a:latin typeface="+mn-lt"/>
+                <a:ea typeface="+mn-ea"/>
+                <a:cs typeface="+mn-cs"/>
+              </a:defRPr>
+            </a:lvl9pPr>
+          </a:lstStyle>
           <a:p>
-            <a:pPr>
-              <a:defRPr sz="2000"/>
-            </a:pPr>
             <a:r>
-              <a:t>Flow &amp; Stability – Lead time for change trending down.</a:t>
+              <a:rPr lang="en-US" b="1" dirty="0"/>
+              <a:t>Anti-Patterns</a:t>
             </a:r>
-          </a:p>
-          <a:p>
-            <a:pPr>
-              <a:defRPr sz="2000"/>
-            </a:pPr>
-            <a:r>
-              <a:t>Flow &amp; Stability – Deployment frequency increasing where risk allows.</a:t>
-            </a:r>
-          </a:p>
-          <a:p>
-            <a:pPr>
-              <a:defRPr sz="2000"/>
-            </a:pPr>
-            <a:r>
-              <a:t>Flow &amp; Stability – Change fail rate and MTTR trending down.</a:t>
-            </a:r>
-          </a:p>
-          <a:p>
-            <a:pPr>
-              <a:defRPr sz="2000"/>
-            </a:pPr>
-            <a:r>
-              <a:t>Quality – Defect escape rate to UAT/production decreasing.</a:t>
-            </a:r>
-          </a:p>
-          <a:p>
-            <a:pPr>
-              <a:defRPr sz="2000"/>
-            </a:pPr>
-            <a:r>
-              <a:t>Quality – Coverage and linting warnings within agreed thresholds.</a:t>
-            </a:r>
-          </a:p>
-          <a:p>
-            <a:pPr>
-              <a:defRPr sz="2000"/>
-            </a:pPr>
-            <a:r>
-              <a:t>Governance – Percentage of changes going through the full SDLC gates.</a:t>
-            </a:r>
-          </a:p>
-          <a:p>
-            <a:pPr>
-              <a:defRPr sz="2000"/>
-            </a:pPr>
-            <a:r>
-              <a:t>Governance – Percentage of infrastructure changes done via IaC, not manual.</a:t>
-            </a:r>
-          </a:p>
-          <a:p>
-            <a:pPr>
-              <a:defRPr sz="2000"/>
-            </a:pPr>
-            <a:r>
-              <a:t>Champion Role – Use these metrics in team reviews and retros; escalate systemic blockers.</a:t>
-            </a:r>
+            <a:endParaRPr lang="en-IN" b="1" dirty="0"/>
           </a:p>
         </p:txBody>
       </p:sp>
     </p:spTree>
+    <p:custDataLst>
+      <p:tags r:id="rId1"/>
+    </p:custDataLst>
+    <p:extLst>
+      <p:ext uri="{BB962C8B-B14F-4D97-AF65-F5344CB8AC3E}">
+        <p14:creationId xmlns:p14="http://schemas.microsoft.com/office/powerpoint/2010/main" val="1827000002"/>
+      </p:ext>
+    </p:extLst>
   </p:cSld>
   <p:clrMapOvr>
     <a:masterClrMapping/>
   </p:clrMapOvr>
+  <p:transition/>
 </p:sld>
 </file>
 
-<file path=ppt/slides/slide15.xml><?xml version="1.0" encoding="utf-8"?>
-<p:sld xmlns:a="http://schemas.openxmlformats.org/drawingml/2006/main" xmlns:p="http://schemas.openxmlformats.org/presentationml/2006/main" xmlns:r="http://schemas.openxmlformats.org/officeDocument/2006/relationships">
+<file path=ppt/slides/slide17.xml><?xml version="1.0" encoding="utf-8"?>
+<p:sld xmlns:a="http://schemas.openxmlformats.org/drawingml/2006/main" xmlns:r="http://schemas.openxmlformats.org/officeDocument/2006/relationships" xmlns:p="http://schemas.openxmlformats.org/presentationml/2006/main">
   <p:cSld>
     <p:spTree>
       <p:nvGrpSpPr>
-        <p:cNvPr id="1" name=""/>
+        <p:cNvPr id="1" name="">
+          <a:extLst>
+            <a:ext uri="{FF2B5EF4-FFF2-40B4-BE49-F238E27FC236}">
+              <a16:creationId xmlns:a16="http://schemas.microsoft.com/office/drawing/2014/main" id="{7186723C-556B-3D63-A007-2FAD9E632739}"/>
+            </a:ext>
+          </a:extLst>
+        </p:cNvPr>
         <p:cNvGrpSpPr/>
         <p:nvPr/>
       </p:nvGrpSpPr>
-      <p:grpSpPr/>
+      <p:grpSpPr>
+        <a:xfrm>
+          <a:off x="0" y="0"/>
+          <a:ext cx="0" cy="0"/>
+          <a:chOff x="0" y="0"/>
+          <a:chExt cx="0" cy="0"/>
+        </a:xfrm>
+      </p:grpSpPr>
       <p:sp>
         <p:nvSpPr>
-          <p:cNvPr id="2" name="Title 1"/>
+          <p:cNvPr id="2" name="Title 1" descr="decorative: Title 1">
+            <a:extLst>
+              <a:ext uri="{FF2B5EF4-FFF2-40B4-BE49-F238E27FC236}">
+                <a16:creationId xmlns:a16="http://schemas.microsoft.com/office/drawing/2014/main" id="{1D03B855-249E-E159-E77C-C42EBC228515}"/>
+              </a:ext>
+            </a:extLst>
+          </p:cNvPr>
           <p:cNvSpPr>
             <a:spLocks noGrp="1"/>
           </p:cNvSpPr>
@@ -20721,652 +21396,497 @@
           <a:lstStyle/>
           <a:p>
             <a:r>
-              <a:t>What Good Looks Like (Metrics)</a:t>
+              <a:rPr lang="en-US" b="1" dirty="0"/>
+              <a:t>Champion Enablement &amp; Support</a:t>
+            </a:r>
+            <a:endParaRPr lang="en-IN" b="1" dirty="0"/>
+          </a:p>
+        </p:txBody>
+      </p:sp>
+      <p:sp>
+        <p:nvSpPr>
+          <p:cNvPr id="5" name="Content Placeholder 1" descr="decorative: Content Placeholder 1">
+            <a:extLst>
+              <a:ext uri="{FF2B5EF4-FFF2-40B4-BE49-F238E27FC236}">
+                <a16:creationId xmlns:a16="http://schemas.microsoft.com/office/drawing/2014/main" id="{C606EA3C-6624-CDA1-86E7-2CE94BEEB0B7}"/>
+              </a:ext>
+            </a:extLst>
+          </p:cNvPr>
+          <p:cNvSpPr txBox="1"/>
+          <p:nvPr/>
+        </p:nvSpPr>
+        <p:spPr>
+          <a:xfrm>
+            <a:off x="748100" y="1871686"/>
+            <a:ext cx="10820400" cy="1411010"/>
+          </a:xfrm>
+          <a:prstGeom prst="rect">
+            <a:avLst/>
+          </a:prstGeom>
+          <a:noFill/>
+          <a:ln w="6350">
+            <a:noFill/>
+          </a:ln>
+        </p:spPr>
+        <p:txBody>
+          <a:bodyPr>
+            <a:noAutofit/>
+          </a:bodyPr>
+          <a:lstStyle>
+            <a:defPPr>
+              <a:defRPr lang="en-US"/>
+            </a:defPPr>
+            <a:lvl1pPr marL="182880" indent="-182880" algn="l" defTabSz="457200" rtl="0" eaLnBrk="1" fontAlgn="b" latinLnBrk="0" hangingPunct="1">
+              <a:lnSpc>
+                <a:spcPct val="100000"/>
+              </a:lnSpc>
+              <a:spcBef>
+                <a:spcPct val="0"/>
+              </a:spcBef>
+              <a:spcAft>
+                <a:spcPts val="300"/>
+              </a:spcAft>
+              <a:buFont typeface="Arial" pitchFamily="34" charset="0"/>
+              <a:buChar char="•"/>
+              <a:defRPr sz="1050" b="0" i="0" u="none" strike="noStrike" kern="1200">
+                <a:solidFill>
+                  <a:srgbClr val="121314"/>
+                </a:solidFill>
+                <a:effectLst/>
+                <a:latin typeface="Avenir Next LT Pro" panose="020B0504020202020204" pitchFamily="34" charset="77"/>
+                <a:ea typeface="+mn-ea"/>
+                <a:cs typeface="Calibri" panose="020F0502020204030204" pitchFamily="34" charset="0"/>
+              </a:defRPr>
+            </a:lvl1pPr>
+            <a:lvl2pPr marL="360000" indent="-180000" algn="l" defTabSz="457200" rtl="0" eaLnBrk="1" latinLnBrk="0" hangingPunct="1">
+              <a:lnSpc>
+                <a:spcPct val="120000"/>
+              </a:lnSpc>
+              <a:spcBef>
+                <a:spcPct val="0"/>
+              </a:spcBef>
+              <a:buFont typeface="Verdana" panose="020B0604030504040204" pitchFamily="34" charset="0"/>
+              <a:buChar char="‒"/>
+              <a:defRPr sz="1400" kern="1200">
+                <a:solidFill>
+                  <a:schemeClr val="accent3">
+                    <a:lumMod val="50000"/>
+                  </a:schemeClr>
+                </a:solidFill>
+                <a:latin typeface="+mn-lt"/>
+                <a:ea typeface="+mn-ea"/>
+                <a:cs typeface="+mn-cs"/>
+              </a:defRPr>
+            </a:lvl2pPr>
+            <a:lvl3pPr marL="540000" indent="-180000" algn="l" defTabSz="457200" rtl="0" eaLnBrk="1" latinLnBrk="0" hangingPunct="1">
+              <a:lnSpc>
+                <a:spcPct val="120000"/>
+              </a:lnSpc>
+              <a:spcBef>
+                <a:spcPct val="0"/>
+              </a:spcBef>
+              <a:buFont typeface="Arial" pitchFamily="34" charset="0"/>
+              <a:buChar char="•"/>
+              <a:defRPr sz="1200" kern="1200">
+                <a:solidFill>
+                  <a:schemeClr val="accent3">
+                    <a:lumMod val="50000"/>
+                  </a:schemeClr>
+                </a:solidFill>
+                <a:latin typeface="+mn-lt"/>
+                <a:ea typeface="+mn-ea"/>
+                <a:cs typeface="+mn-cs"/>
+              </a:defRPr>
+            </a:lvl3pPr>
+            <a:lvl4pPr marL="720000" indent="-180000" algn="l" defTabSz="457200" rtl="0" eaLnBrk="1" latinLnBrk="0" hangingPunct="1">
+              <a:lnSpc>
+                <a:spcPct val="120000"/>
+              </a:lnSpc>
+              <a:spcBef>
+                <a:spcPct val="0"/>
+              </a:spcBef>
+              <a:buFont typeface="Verdana" panose="020B0604030504040204" pitchFamily="34" charset="0"/>
+              <a:buChar char="‒"/>
+              <a:defRPr sz="1100" kern="1200">
+                <a:solidFill>
+                  <a:schemeClr val="accent3">
+                    <a:lumMod val="50000"/>
+                  </a:schemeClr>
+                </a:solidFill>
+                <a:latin typeface="+mn-lt"/>
+                <a:ea typeface="+mn-ea"/>
+                <a:cs typeface="+mn-cs"/>
+              </a:defRPr>
+            </a:lvl4pPr>
+            <a:lvl5pPr marL="900000" indent="-180000" algn="l" defTabSz="457200" rtl="0" eaLnBrk="1" latinLnBrk="0" hangingPunct="1">
+              <a:lnSpc>
+                <a:spcPct val="120000"/>
+              </a:lnSpc>
+              <a:spcBef>
+                <a:spcPct val="0"/>
+              </a:spcBef>
+              <a:buFont typeface="Verdana" panose="020B0604030504040204" pitchFamily="34" charset="0"/>
+              <a:buChar char="›"/>
+              <a:defRPr sz="1100" kern="1200">
+                <a:solidFill>
+                  <a:schemeClr val="accent3">
+                    <a:lumMod val="50000"/>
+                  </a:schemeClr>
+                </a:solidFill>
+                <a:latin typeface="+mn-lt"/>
+                <a:ea typeface="+mn-ea"/>
+                <a:cs typeface="+mn-cs"/>
+              </a:defRPr>
+            </a:lvl5pPr>
+            <a:lvl6pPr marL="2514600" indent="-228600" algn="l" defTabSz="457200" rtl="0" eaLnBrk="1" latinLnBrk="0" hangingPunct="1">
+              <a:spcBef>
+                <a:spcPct val="20000"/>
+              </a:spcBef>
+              <a:buFont typeface="Arial"/>
+              <a:buChar char="•"/>
+              <a:defRPr sz="2000" kern="1200">
+                <a:solidFill>
+                  <a:schemeClr val="tx1"/>
+                </a:solidFill>
+                <a:latin typeface="+mn-lt"/>
+                <a:ea typeface="+mn-ea"/>
+                <a:cs typeface="+mn-cs"/>
+              </a:defRPr>
+            </a:lvl6pPr>
+            <a:lvl7pPr marL="2971800" indent="-228600" algn="l" defTabSz="457200" rtl="0" eaLnBrk="1" latinLnBrk="0" hangingPunct="1">
+              <a:spcBef>
+                <a:spcPct val="20000"/>
+              </a:spcBef>
+              <a:buFont typeface="Arial"/>
+              <a:buChar char="•"/>
+              <a:defRPr sz="2000" kern="1200">
+                <a:solidFill>
+                  <a:schemeClr val="tx1"/>
+                </a:solidFill>
+                <a:latin typeface="+mn-lt"/>
+                <a:ea typeface="+mn-ea"/>
+                <a:cs typeface="+mn-cs"/>
+              </a:defRPr>
+            </a:lvl7pPr>
+            <a:lvl8pPr marL="3429000" indent="-228600" algn="l" defTabSz="457200" rtl="0" eaLnBrk="1" latinLnBrk="0" hangingPunct="1">
+              <a:spcBef>
+                <a:spcPct val="20000"/>
+              </a:spcBef>
+              <a:buFont typeface="Arial"/>
+              <a:buChar char="•"/>
+              <a:defRPr sz="2000" kern="1200">
+                <a:solidFill>
+                  <a:schemeClr val="tx1"/>
+                </a:solidFill>
+                <a:latin typeface="+mn-lt"/>
+                <a:ea typeface="+mn-ea"/>
+                <a:cs typeface="+mn-cs"/>
+              </a:defRPr>
+            </a:lvl8pPr>
+            <a:lvl9pPr marL="3886200" indent="-228600" algn="l" defTabSz="457200" rtl="0" eaLnBrk="1" latinLnBrk="0" hangingPunct="1">
+              <a:spcBef>
+                <a:spcPct val="20000"/>
+              </a:spcBef>
+              <a:buFont typeface="Arial"/>
+              <a:buChar char="•"/>
+              <a:defRPr sz="2000" kern="1200">
+                <a:solidFill>
+                  <a:schemeClr val="tx1"/>
+                </a:solidFill>
+                <a:latin typeface="+mn-lt"/>
+                <a:ea typeface="+mn-ea"/>
+                <a:cs typeface="+mn-cs"/>
+              </a:defRPr>
+            </a:lvl9pPr>
+          </a:lstStyle>
+          <a:p>
+            <a:pPr marL="144000" indent="-144000">
+              <a:spcBef>
+                <a:spcPts val="600"/>
+              </a:spcBef>
+              <a:spcAft>
+                <a:spcPts val="600"/>
+              </a:spcAft>
+              <a:buClr>
+                <a:schemeClr val="accent1"/>
+              </a:buClr>
+            </a:pPr>
+            <a:r>
+              <a:rPr lang="en-US" sz="1800" dirty="0"/>
+              <a:t>Toolkit – SDLC Confluence space: phases, steps, and checklists.</a:t>
+            </a:r>
+          </a:p>
+          <a:p>
+            <a:pPr marL="144000" indent="-144000">
+              <a:spcBef>
+                <a:spcPts val="600"/>
+              </a:spcBef>
+              <a:spcAft>
+                <a:spcPts val="600"/>
+              </a:spcAft>
+              <a:buClr>
+                <a:schemeClr val="accent1"/>
+              </a:buClr>
+            </a:pPr>
+            <a:r>
+              <a:rPr lang="en-US" sz="1800" dirty="0"/>
+              <a:t>Toolkit – Templates for ADRs, test strategies, runbooks, and IaC/pipeline examples.</a:t>
+            </a:r>
+          </a:p>
+          <a:p>
+            <a:pPr marL="144000" indent="-144000">
+              <a:spcBef>
+                <a:spcPts val="600"/>
+              </a:spcBef>
+              <a:spcAft>
+                <a:spcPts val="600"/>
+              </a:spcAft>
+              <a:buClr>
+                <a:schemeClr val="accent1"/>
+              </a:buClr>
+            </a:pPr>
+            <a:r>
+              <a:rPr lang="en-US" sz="1800" dirty="0"/>
+              <a:t>Toolkit – Example repositories showing the 'golden path' implementations.</a:t>
+            </a:r>
+          </a:p>
+          <a:p>
+            <a:pPr marL="144000" indent="-144000">
+              <a:spcBef>
+                <a:spcPts val="600"/>
+              </a:spcBef>
+              <a:spcAft>
+                <a:spcPts val="600"/>
+              </a:spcAft>
+              <a:buClr>
+                <a:schemeClr val="accent1"/>
+              </a:buClr>
+            </a:pPr>
+            <a:r>
+              <a:rPr lang="en-US" sz="1800" dirty="0"/>
+              <a:t>Community – Developer Champions circles/guilds and regular syncs with CoE, Platform, Security.</a:t>
+            </a:r>
+          </a:p>
+          <a:p>
+            <a:pPr marL="144000" indent="-144000">
+              <a:spcBef>
+                <a:spcPts val="600"/>
+              </a:spcBef>
+              <a:spcAft>
+                <a:spcPts val="600"/>
+              </a:spcAft>
+              <a:buClr>
+                <a:schemeClr val="accent1"/>
+              </a:buClr>
+            </a:pPr>
+            <a:r>
+              <a:rPr lang="en-US" sz="1800" dirty="0"/>
+              <a:t>Support – Contact: &lt;CoE Architecture DL / Teams channel&gt; for guidance and escalation.</a:t>
+            </a:r>
+          </a:p>
+          <a:p>
+            <a:pPr marL="144000" indent="-144000">
+              <a:spcBef>
+                <a:spcPts val="600"/>
+              </a:spcBef>
+              <a:spcAft>
+                <a:spcPts val="600"/>
+              </a:spcAft>
+              <a:buClr>
+                <a:schemeClr val="accent1"/>
+              </a:buClr>
+            </a:pPr>
+            <a:r>
+              <a:rPr lang="en-US" sz="1800" dirty="0"/>
+              <a:t>Practice – Use structured feedback: what worked, what did not, and your proposal.</a:t>
+            </a:r>
+          </a:p>
+          <a:p>
+            <a:pPr marL="144000" indent="-144000">
+              <a:spcBef>
+                <a:spcPts val="600"/>
+              </a:spcBef>
+              <a:spcAft>
+                <a:spcPts val="600"/>
+              </a:spcAft>
+              <a:buClr>
+                <a:schemeClr val="accent1"/>
+              </a:buClr>
+            </a:pPr>
+            <a:r>
+              <a:rPr lang="en-US" sz="1800" dirty="0"/>
+              <a:t>Expectation – You are the feedback loop from delivery to architecture.</a:t>
+            </a:r>
+          </a:p>
+          <a:p>
+            <a:pPr marL="144000" indent="-144000">
+              <a:spcBef>
+                <a:spcPts val="600"/>
+              </a:spcBef>
+              <a:spcAft>
+                <a:spcPts val="600"/>
+              </a:spcAft>
+              <a:buClr>
+                <a:schemeClr val="accent1"/>
+              </a:buClr>
+            </a:pPr>
+            <a:r>
+              <a:rPr lang="en-US" sz="1800" dirty="0"/>
+              <a:t>Expectation – Help turn SDLC from a document into a living practice.</a:t>
             </a:r>
           </a:p>
         </p:txBody>
       </p:sp>
       <p:sp>
         <p:nvSpPr>
-          <p:cNvPr id="3" name="Picture Placeholder 2"/>
-          <p:cNvSpPr>
-            <a:spLocks noGrp="1"/>
-          </p:cNvSpPr>
-          <p:nvPr>
-            <p:ph type="pic" idx="10" sz="quarter"/>
-          </p:nvPr>
+          <p:cNvPr id="7" name="Rectangle 6" descr="decorative: Rectangle 6">
+            <a:extLst>
+              <a:ext uri="{FF2B5EF4-FFF2-40B4-BE49-F238E27FC236}">
+                <a16:creationId xmlns:a16="http://schemas.microsoft.com/office/drawing/2014/main" id="{A5D7B4EE-12B9-6025-E728-100563B62882}"/>
+              </a:ext>
+            </a:extLst>
+          </p:cNvPr>
+          <p:cNvSpPr/>
+          <p:nvPr/>
         </p:nvSpPr>
-        <p:spPr/>
+        <p:spPr>
+          <a:xfrm>
+            <a:off x="748100" y="1414182"/>
+            <a:ext cx="2952000" cy="367641"/>
+          </a:xfrm>
+          <a:prstGeom prst="rect">
+            <a:avLst/>
+          </a:prstGeom>
+          <a:solidFill>
+            <a:srgbClr val="FFD366"/>
+          </a:solidFill>
+          <a:ln w="12700" cap="flat" cmpd="sng" algn="ctr">
+            <a:noFill/>
+            <a:prstDash val="solid"/>
+            <a:miter lim="800000"/>
+          </a:ln>
+          <a:effectLst/>
+        </p:spPr>
         <p:txBody>
-          <a:bodyPr/>
-          <a:p/>
-        </p:txBody>
-      </p:sp>
-      <p:sp>
-        <p:nvSpPr>
-          <p:cNvPr id="4" name="Text Placeholder 3"/>
-          <p:cNvSpPr>
-            <a:spLocks noGrp="1"/>
-          </p:cNvSpPr>
-          <p:nvPr>
-            <p:ph type="body" idx="11" sz="quarter"/>
-          </p:nvPr>
-        </p:nvSpPr>
-        <p:spPr/>
-        <p:txBody>
-          <a:bodyPr/>
-          <a:lstStyle/>
+          <a:bodyPr lIns="216000" rtlCol="0" anchor="ctr"/>
+          <a:lstStyle>
+            <a:defPPr>
+              <a:defRPr lang="en-US"/>
+            </a:defPPr>
+            <a:lvl1pPr marL="0" algn="l" defTabSz="914400" rtl="0" eaLnBrk="1" latinLnBrk="0" hangingPunct="1">
+              <a:defRPr sz="1800" kern="1200">
+                <a:solidFill>
+                  <a:schemeClr val="tx1"/>
+                </a:solidFill>
+                <a:latin typeface="+mn-lt"/>
+                <a:ea typeface="+mn-ea"/>
+                <a:cs typeface="+mn-cs"/>
+              </a:defRPr>
+            </a:lvl1pPr>
+            <a:lvl2pPr marL="457200" algn="l" defTabSz="914400" rtl="0" eaLnBrk="1" latinLnBrk="0" hangingPunct="1">
+              <a:defRPr sz="1800" kern="1200">
+                <a:solidFill>
+                  <a:schemeClr val="tx1"/>
+                </a:solidFill>
+                <a:latin typeface="+mn-lt"/>
+                <a:ea typeface="+mn-ea"/>
+                <a:cs typeface="+mn-cs"/>
+              </a:defRPr>
+            </a:lvl2pPr>
+            <a:lvl3pPr marL="914400" algn="l" defTabSz="914400" rtl="0" eaLnBrk="1" latinLnBrk="0" hangingPunct="1">
+              <a:defRPr sz="1800" kern="1200">
+                <a:solidFill>
+                  <a:schemeClr val="tx1"/>
+                </a:solidFill>
+                <a:latin typeface="+mn-lt"/>
+                <a:ea typeface="+mn-ea"/>
+                <a:cs typeface="+mn-cs"/>
+              </a:defRPr>
+            </a:lvl3pPr>
+            <a:lvl4pPr marL="1371600" algn="l" defTabSz="914400" rtl="0" eaLnBrk="1" latinLnBrk="0" hangingPunct="1">
+              <a:defRPr sz="1800" kern="1200">
+                <a:solidFill>
+                  <a:schemeClr val="tx1"/>
+                </a:solidFill>
+                <a:latin typeface="+mn-lt"/>
+                <a:ea typeface="+mn-ea"/>
+                <a:cs typeface="+mn-cs"/>
+              </a:defRPr>
+            </a:lvl4pPr>
+            <a:lvl5pPr marL="1828800" algn="l" defTabSz="914400" rtl="0" eaLnBrk="1" latinLnBrk="0" hangingPunct="1">
+              <a:defRPr sz="1800" kern="1200">
+                <a:solidFill>
+                  <a:schemeClr val="tx1"/>
+                </a:solidFill>
+                <a:latin typeface="+mn-lt"/>
+                <a:ea typeface="+mn-ea"/>
+                <a:cs typeface="+mn-cs"/>
+              </a:defRPr>
+            </a:lvl5pPr>
+            <a:lvl6pPr marL="2286000" algn="l" defTabSz="914400" rtl="0" eaLnBrk="1" latinLnBrk="0" hangingPunct="1">
+              <a:defRPr sz="1800" kern="1200">
+                <a:solidFill>
+                  <a:schemeClr val="tx1"/>
+                </a:solidFill>
+                <a:latin typeface="+mn-lt"/>
+                <a:ea typeface="+mn-ea"/>
+                <a:cs typeface="+mn-cs"/>
+              </a:defRPr>
+            </a:lvl6pPr>
+            <a:lvl7pPr marL="2743200" algn="l" defTabSz="914400" rtl="0" eaLnBrk="1" latinLnBrk="0" hangingPunct="1">
+              <a:defRPr sz="1800" kern="1200">
+                <a:solidFill>
+                  <a:schemeClr val="tx1"/>
+                </a:solidFill>
+                <a:latin typeface="+mn-lt"/>
+                <a:ea typeface="+mn-ea"/>
+                <a:cs typeface="+mn-cs"/>
+              </a:defRPr>
+            </a:lvl7pPr>
+            <a:lvl8pPr marL="3200400" algn="l" defTabSz="914400" rtl="0" eaLnBrk="1" latinLnBrk="0" hangingPunct="1">
+              <a:defRPr sz="1800" kern="1200">
+                <a:solidFill>
+                  <a:schemeClr val="tx1"/>
+                </a:solidFill>
+                <a:latin typeface="+mn-lt"/>
+                <a:ea typeface="+mn-ea"/>
+                <a:cs typeface="+mn-cs"/>
+              </a:defRPr>
+            </a:lvl8pPr>
+            <a:lvl9pPr marL="3657600" algn="l" defTabSz="914400" rtl="0" eaLnBrk="1" latinLnBrk="0" hangingPunct="1">
+              <a:defRPr sz="1800" kern="1200">
+                <a:solidFill>
+                  <a:schemeClr val="tx1"/>
+                </a:solidFill>
+                <a:latin typeface="+mn-lt"/>
+                <a:ea typeface="+mn-ea"/>
+                <a:cs typeface="+mn-cs"/>
+              </a:defRPr>
+            </a:lvl9pPr>
+          </a:lstStyle>
           <a:p>
-            <a:pPr>
-              <a:defRPr sz="2000"/>
-            </a:pPr>
             <a:r>
-              <a:t>Flow &amp; Stability – Lead time for change trending down.</a:t>
+              <a:rPr lang="en-US" b="1" dirty="0"/>
+              <a:t>Broad-Points</a:t>
             </a:r>
-          </a:p>
-          <a:p>
-            <a:pPr>
-              <a:defRPr sz="2000"/>
-            </a:pPr>
-            <a:r>
-              <a:t>Flow &amp; Stability – Deployment frequency increasing where risk allows.</a:t>
-            </a:r>
-          </a:p>
-          <a:p>
-            <a:pPr>
-              <a:defRPr sz="2000"/>
-            </a:pPr>
-            <a:r>
-              <a:t>Flow &amp; Stability – Change fail rate and MTTR trending down.</a:t>
-            </a:r>
-          </a:p>
-          <a:p>
-            <a:pPr>
-              <a:defRPr sz="2000"/>
-            </a:pPr>
-            <a:r>
-              <a:t>Quality – Defect escape rate to UAT/production decreasing.</a:t>
-            </a:r>
-          </a:p>
-          <a:p>
-            <a:pPr>
-              <a:defRPr sz="2000"/>
-            </a:pPr>
-            <a:r>
-              <a:t>Quality – Coverage and linting warnings within agreed thresholds.</a:t>
-            </a:r>
-          </a:p>
-          <a:p>
-            <a:pPr>
-              <a:defRPr sz="2000"/>
-            </a:pPr>
-            <a:r>
-              <a:t>Governance – Percentage of changes going through the full SDLC gates.</a:t>
-            </a:r>
-          </a:p>
-          <a:p>
-            <a:pPr>
-              <a:defRPr sz="2000"/>
-            </a:pPr>
-            <a:r>
-              <a:t>Governance – Percentage of infrastructure changes done via IaC, not manual.</a:t>
-            </a:r>
-          </a:p>
-          <a:p>
-            <a:pPr>
-              <a:defRPr sz="2000"/>
-            </a:pPr>
-            <a:r>
-              <a:t>Champion Role – Use these metrics in team reviews and retros; escalate systemic blockers.</a:t>
-            </a:r>
+            <a:endParaRPr lang="en-IN" b="1" dirty="0"/>
           </a:p>
         </p:txBody>
       </p:sp>
     </p:spTree>
+    <p:custDataLst>
+      <p:tags r:id="rId1"/>
+    </p:custDataLst>
+    <p:extLst>
+      <p:ext uri="{BB962C8B-B14F-4D97-AF65-F5344CB8AC3E}">
+        <p14:creationId xmlns:p14="http://schemas.microsoft.com/office/powerpoint/2010/main" val="2775108469"/>
+      </p:ext>
+    </p:extLst>
   </p:cSld>
   <p:clrMapOvr>
     <a:masterClrMapping/>
   </p:clrMapOvr>
-</p:sld>
-</file>
-
-<file path=ppt/slides/slide16.xml><?xml version="1.0" encoding="utf-8"?>
-<p:sld xmlns:a="http://schemas.openxmlformats.org/drawingml/2006/main" xmlns:p="http://schemas.openxmlformats.org/presentationml/2006/main" xmlns:r="http://schemas.openxmlformats.org/officeDocument/2006/relationships">
-  <p:cSld>
-    <p:spTree>
-      <p:nvGrpSpPr>
-        <p:cNvPr id="1" name=""/>
-        <p:cNvGrpSpPr/>
-        <p:nvPr/>
-      </p:nvGrpSpPr>
-      <p:grpSpPr/>
-      <p:sp>
-        <p:nvSpPr>
-          <p:cNvPr id="2" name="Title 1"/>
-          <p:cNvSpPr>
-            <a:spLocks noGrp="1"/>
-          </p:cNvSpPr>
-          <p:nvPr>
-            <p:ph type="title"/>
-          </p:nvPr>
-        </p:nvSpPr>
-        <p:spPr/>
-        <p:txBody>
-          <a:bodyPr/>
-          <a:lstStyle/>
-          <a:p>
-            <a:r>
-              <a:t>Common Anti-Patterns To Watch For</a:t>
-            </a:r>
-          </a:p>
-        </p:txBody>
-      </p:sp>
-      <p:sp>
-        <p:nvSpPr>
-          <p:cNvPr id="3" name="Picture Placeholder 2"/>
-          <p:cNvSpPr>
-            <a:spLocks noGrp="1"/>
-          </p:cNvSpPr>
-          <p:nvPr>
-            <p:ph type="pic" idx="10" sz="quarter"/>
-          </p:nvPr>
-        </p:nvSpPr>
-        <p:spPr/>
-        <p:txBody>
-          <a:bodyPr/>
-          <a:p/>
-        </p:txBody>
-      </p:sp>
-      <p:sp>
-        <p:nvSpPr>
-          <p:cNvPr id="4" name="Text Placeholder 3"/>
-          <p:cNvSpPr>
-            <a:spLocks noGrp="1"/>
-          </p:cNvSpPr>
-          <p:nvPr>
-            <p:ph type="body" idx="11" sz="quarter"/>
-          </p:nvPr>
-        </p:nvSpPr>
-        <p:spPr/>
-        <p:txBody>
-          <a:bodyPr/>
-          <a:lstStyle/>
-          <a:p>
-            <a:pPr>
-              <a:defRPr sz="2000"/>
-            </a:pPr>
-            <a:r>
-              <a:t>Process Bypass – 'Quick fixes' merged directly to main without reviews or tests.</a:t>
-            </a:r>
-          </a:p>
-          <a:p>
-            <a:pPr>
-              <a:defRPr sz="2000"/>
-            </a:pPr>
-            <a:r>
-              <a:t>Process Bypass – Manual environment changes never back-ported into IaC.</a:t>
-            </a:r>
-          </a:p>
-          <a:p>
-            <a:pPr>
-              <a:defRPr sz="2000"/>
-            </a:pPr>
-            <a:r>
-              <a:t>Fake Quality Gates – Rubber-stamp reviews with no meaningful comments.</a:t>
-            </a:r>
-          </a:p>
-          <a:p>
-            <a:pPr>
-              <a:defRPr sz="2000"/>
-            </a:pPr>
-            <a:r>
-              <a:t>Fake Quality Gates – Linting/tests configured but routinely ignored or overridden.</a:t>
-            </a:r>
-          </a:p>
-          <a:p>
-            <a:pPr>
-              <a:defRPr sz="2000"/>
-            </a:pPr>
-            <a:r>
-              <a:t>Hero Dependency – One person who 'just knows' how to deploy or fix issues.</a:t>
-            </a:r>
-          </a:p>
-          <a:p>
-            <a:pPr>
-              <a:defRPr sz="2000"/>
-            </a:pPr>
-            <a:r>
-              <a:t>Hero Dependency – Key knowledge not captured in runbooks, ADRs, or comments.</a:t>
-            </a:r>
-          </a:p>
-          <a:p>
-            <a:pPr>
-              <a:defRPr sz="2000"/>
-            </a:pPr>
-            <a:r>
-              <a:t>Over-bureaucracy – Gates that add friction but no real risk reduction.</a:t>
-            </a:r>
-          </a:p>
-          <a:p>
-            <a:pPr>
-              <a:defRPr sz="2000"/>
-            </a:pPr>
-            <a:r>
-              <a:t>Champion Response – Call these out early and propose automation/simplification.</a:t>
-            </a:r>
-          </a:p>
-        </p:txBody>
-      </p:sp>
-    </p:spTree>
-  </p:cSld>
-  <p:clrMapOvr>
-    <a:masterClrMapping/>
-  </p:clrMapOvr>
-</p:sld>
-</file>
-
-<file path=ppt/slides/slide16.xml><?xml version="1.0" encoding="utf-8"?>
-<p:sld xmlns:a="http://schemas.openxmlformats.org/drawingml/2006/main" xmlns:p="http://schemas.openxmlformats.org/presentationml/2006/main" xmlns:r="http://schemas.openxmlformats.org/officeDocument/2006/relationships">
-  <p:cSld>
-    <p:spTree>
-      <p:nvGrpSpPr>
-        <p:cNvPr id="1" name=""/>
-        <p:cNvGrpSpPr/>
-        <p:nvPr/>
-      </p:nvGrpSpPr>
-      <p:grpSpPr/>
-      <p:sp>
-        <p:nvSpPr>
-          <p:cNvPr id="2" name="Title 1"/>
-          <p:cNvSpPr>
-            <a:spLocks noGrp="1"/>
-          </p:cNvSpPr>
-          <p:nvPr>
-            <p:ph type="title"/>
-          </p:nvPr>
-        </p:nvSpPr>
-        <p:spPr/>
-        <p:txBody>
-          <a:bodyPr/>
-          <a:lstStyle/>
-          <a:p>
-            <a:r>
-              <a:t>Common Anti-Patterns To Watch For</a:t>
-            </a:r>
-          </a:p>
-        </p:txBody>
-      </p:sp>
-      <p:sp>
-        <p:nvSpPr>
-          <p:cNvPr id="3" name="Picture Placeholder 2"/>
-          <p:cNvSpPr>
-            <a:spLocks noGrp="1"/>
-          </p:cNvSpPr>
-          <p:nvPr>
-            <p:ph type="pic" idx="10" sz="quarter"/>
-          </p:nvPr>
-        </p:nvSpPr>
-        <p:spPr/>
-        <p:txBody>
-          <a:bodyPr/>
-          <a:p/>
-        </p:txBody>
-      </p:sp>
-      <p:sp>
-        <p:nvSpPr>
-          <p:cNvPr id="4" name="Text Placeholder 3"/>
-          <p:cNvSpPr>
-            <a:spLocks noGrp="1"/>
-          </p:cNvSpPr>
-          <p:nvPr>
-            <p:ph type="body" idx="11" sz="quarter"/>
-          </p:nvPr>
-        </p:nvSpPr>
-        <p:spPr/>
-        <p:txBody>
-          <a:bodyPr/>
-          <a:lstStyle/>
-          <a:p>
-            <a:pPr>
-              <a:defRPr sz="2000"/>
-            </a:pPr>
-            <a:r>
-              <a:t>Process Bypass – 'Quick fixes' merged directly to main without reviews or tests.</a:t>
-            </a:r>
-          </a:p>
-          <a:p>
-            <a:pPr>
-              <a:defRPr sz="2000"/>
-            </a:pPr>
-            <a:r>
-              <a:t>Process Bypass – Manual environment changes never back-ported into IaC.</a:t>
-            </a:r>
-          </a:p>
-          <a:p>
-            <a:pPr>
-              <a:defRPr sz="2000"/>
-            </a:pPr>
-            <a:r>
-              <a:t>Fake Quality Gates – Rubber-stamp reviews with no meaningful comments.</a:t>
-            </a:r>
-          </a:p>
-          <a:p>
-            <a:pPr>
-              <a:defRPr sz="2000"/>
-            </a:pPr>
-            <a:r>
-              <a:t>Fake Quality Gates – Linting/tests configured but routinely ignored or overridden.</a:t>
-            </a:r>
-          </a:p>
-          <a:p>
-            <a:pPr>
-              <a:defRPr sz="2000"/>
-            </a:pPr>
-            <a:r>
-              <a:t>Hero Dependency – One person who 'just knows' how to deploy or fix issues.</a:t>
-            </a:r>
-          </a:p>
-          <a:p>
-            <a:pPr>
-              <a:defRPr sz="2000"/>
-            </a:pPr>
-            <a:r>
-              <a:t>Hero Dependency – Key knowledge not captured in runbooks, ADRs, or comments.</a:t>
-            </a:r>
-          </a:p>
-          <a:p>
-            <a:pPr>
-              <a:defRPr sz="2000"/>
-            </a:pPr>
-            <a:r>
-              <a:t>Over-bureaucracy – Gates that add friction but no real risk reduction.</a:t>
-            </a:r>
-          </a:p>
-          <a:p>
-            <a:pPr>
-              <a:defRPr sz="2000"/>
-            </a:pPr>
-            <a:r>
-              <a:t>Champion Response – Call these out early and propose automation/simplification.</a:t>
-            </a:r>
-          </a:p>
-        </p:txBody>
-      </p:sp>
-    </p:spTree>
-  </p:cSld>
-  <p:clrMapOvr>
-    <a:masterClrMapping/>
-  </p:clrMapOvr>
-</p:sld>
-</file>
-
-<file path=ppt/slides/slide17.xml><?xml version="1.0" encoding="utf-8"?>
-<p:sld xmlns:a="http://schemas.openxmlformats.org/drawingml/2006/main" xmlns:p="http://schemas.openxmlformats.org/presentationml/2006/main" xmlns:r="http://schemas.openxmlformats.org/officeDocument/2006/relationships">
-  <p:cSld>
-    <p:spTree>
-      <p:nvGrpSpPr>
-        <p:cNvPr id="1" name=""/>
-        <p:cNvGrpSpPr/>
-        <p:nvPr/>
-      </p:nvGrpSpPr>
-      <p:grpSpPr/>
-      <p:sp>
-        <p:nvSpPr>
-          <p:cNvPr id="2" name="Title 1"/>
-          <p:cNvSpPr>
-            <a:spLocks noGrp="1"/>
-          </p:cNvSpPr>
-          <p:nvPr>
-            <p:ph type="title"/>
-          </p:nvPr>
-        </p:nvSpPr>
-        <p:spPr/>
-        <p:txBody>
-          <a:bodyPr/>
-          <a:lstStyle/>
-          <a:p>
-            <a:r>
-              <a:t>Champion Enablement &amp; Support</a:t>
-            </a:r>
-          </a:p>
-        </p:txBody>
-      </p:sp>
-      <p:sp>
-        <p:nvSpPr>
-          <p:cNvPr id="3" name="Picture Placeholder 2"/>
-          <p:cNvSpPr>
-            <a:spLocks noGrp="1"/>
-          </p:cNvSpPr>
-          <p:nvPr>
-            <p:ph type="pic" idx="10" sz="quarter"/>
-          </p:nvPr>
-        </p:nvSpPr>
-        <p:spPr/>
-        <p:txBody>
-          <a:bodyPr/>
-          <a:p/>
-        </p:txBody>
-      </p:sp>
-      <p:sp>
-        <p:nvSpPr>
-          <p:cNvPr id="4" name="Text Placeholder 3"/>
-          <p:cNvSpPr>
-            <a:spLocks noGrp="1"/>
-          </p:cNvSpPr>
-          <p:nvPr>
-            <p:ph type="body" idx="11" sz="quarter"/>
-          </p:nvPr>
-        </p:nvSpPr>
-        <p:spPr/>
-        <p:txBody>
-          <a:bodyPr/>
-          <a:lstStyle/>
-          <a:p>
-            <a:pPr>
-              <a:defRPr sz="2000"/>
-            </a:pPr>
-            <a:r>
-              <a:t>Toolkit – SDLC Confluence space: phases, steps, and checklists.</a:t>
-            </a:r>
-          </a:p>
-          <a:p>
-            <a:pPr>
-              <a:defRPr sz="2000"/>
-            </a:pPr>
-            <a:r>
-              <a:t>Toolkit – Templates for ADRs, test strategies, runbooks, and IaC/pipeline examples.</a:t>
-            </a:r>
-          </a:p>
-          <a:p>
-            <a:pPr>
-              <a:defRPr sz="2000"/>
-            </a:pPr>
-            <a:r>
-              <a:t>Toolkit – Example repositories showing the 'golden path' implementations.</a:t>
-            </a:r>
-          </a:p>
-          <a:p>
-            <a:pPr>
-              <a:defRPr sz="2000"/>
-            </a:pPr>
-            <a:r>
-              <a:t>Community – Developer Champions circles/guilds and regular syncs with CoE, Platform, Security.</a:t>
-            </a:r>
-          </a:p>
-          <a:p>
-            <a:pPr>
-              <a:defRPr sz="2000"/>
-            </a:pPr>
-            <a:r>
-              <a:t>Support – Contact: &lt;CoE Architecture DL / Teams channel&gt; for guidance and escalation.</a:t>
-            </a:r>
-          </a:p>
-          <a:p>
-            <a:pPr>
-              <a:defRPr sz="2000"/>
-            </a:pPr>
-            <a:r>
-              <a:t>Practice – Use structured feedback: what worked, what did not, and your proposal.</a:t>
-            </a:r>
-          </a:p>
-          <a:p>
-            <a:pPr>
-              <a:defRPr sz="2000"/>
-            </a:pPr>
-            <a:r>
-              <a:t>Expectation – You are the feedback loop from delivery to architecture.</a:t>
-            </a:r>
-          </a:p>
-          <a:p>
-            <a:pPr>
-              <a:defRPr sz="2000"/>
-            </a:pPr>
-            <a:r>
-              <a:t>Expectation – Help turn SDLC from a document into a living practice.</a:t>
-            </a:r>
-          </a:p>
-        </p:txBody>
-      </p:sp>
-    </p:spTree>
-  </p:cSld>
-  <p:clrMapOvr>
-    <a:masterClrMapping/>
-  </p:clrMapOvr>
-</p:sld>
-</file>
-
-<file path=ppt/slides/slide17.xml><?xml version="1.0" encoding="utf-8"?>
-<p:sld xmlns:a="http://schemas.openxmlformats.org/drawingml/2006/main" xmlns:p="http://schemas.openxmlformats.org/presentationml/2006/main" xmlns:r="http://schemas.openxmlformats.org/officeDocument/2006/relationships">
-  <p:cSld>
-    <p:spTree>
-      <p:nvGrpSpPr>
-        <p:cNvPr id="1" name=""/>
-        <p:cNvGrpSpPr/>
-        <p:nvPr/>
-      </p:nvGrpSpPr>
-      <p:grpSpPr/>
-      <p:sp>
-        <p:nvSpPr>
-          <p:cNvPr id="2" name="Title 1"/>
-          <p:cNvSpPr>
-            <a:spLocks noGrp="1"/>
-          </p:cNvSpPr>
-          <p:nvPr>
-            <p:ph type="title"/>
-          </p:nvPr>
-        </p:nvSpPr>
-        <p:spPr/>
-        <p:txBody>
-          <a:bodyPr/>
-          <a:lstStyle/>
-          <a:p>
-            <a:r>
-              <a:t>Champion Enablement &amp; Support</a:t>
-            </a:r>
-          </a:p>
-        </p:txBody>
-      </p:sp>
-      <p:sp>
-        <p:nvSpPr>
-          <p:cNvPr id="3" name="Picture Placeholder 2"/>
-          <p:cNvSpPr>
-            <a:spLocks noGrp="1"/>
-          </p:cNvSpPr>
-          <p:nvPr>
-            <p:ph type="pic" idx="10" sz="quarter"/>
-          </p:nvPr>
-        </p:nvSpPr>
-        <p:spPr/>
-        <p:txBody>
-          <a:bodyPr/>
-          <a:p/>
-        </p:txBody>
-      </p:sp>
-      <p:sp>
-        <p:nvSpPr>
-          <p:cNvPr id="4" name="Text Placeholder 3"/>
-          <p:cNvSpPr>
-            <a:spLocks noGrp="1"/>
-          </p:cNvSpPr>
-          <p:nvPr>
-            <p:ph type="body" idx="11" sz="quarter"/>
-          </p:nvPr>
-        </p:nvSpPr>
-        <p:spPr/>
-        <p:txBody>
-          <a:bodyPr/>
-          <a:lstStyle/>
-          <a:p>
-            <a:pPr>
-              <a:defRPr sz="2000"/>
-            </a:pPr>
-            <a:r>
-              <a:t>Toolkit – SDLC Confluence space: phases, steps, and checklists.</a:t>
-            </a:r>
-          </a:p>
-          <a:p>
-            <a:pPr>
-              <a:defRPr sz="2000"/>
-            </a:pPr>
-            <a:r>
-              <a:t>Toolkit – Templates for ADRs, test strategies, runbooks, and IaC/pipeline examples.</a:t>
-            </a:r>
-          </a:p>
-          <a:p>
-            <a:pPr>
-              <a:defRPr sz="2000"/>
-            </a:pPr>
-            <a:r>
-              <a:t>Toolkit – Example repositories showing the 'golden path' implementations.</a:t>
-            </a:r>
-          </a:p>
-          <a:p>
-            <a:pPr>
-              <a:defRPr sz="2000"/>
-            </a:pPr>
-            <a:r>
-              <a:t>Community – Developer Champions circles/guilds and regular syncs with CoE, Platform, Security.</a:t>
-            </a:r>
-          </a:p>
-          <a:p>
-            <a:pPr>
-              <a:defRPr sz="2000"/>
-            </a:pPr>
-            <a:r>
-              <a:t>Support – Contact: &lt;CoE Architecture DL / Teams channel&gt; for guidance and escalation.</a:t>
-            </a:r>
-          </a:p>
-          <a:p>
-            <a:pPr>
-              <a:defRPr sz="2000"/>
-            </a:pPr>
-            <a:r>
-              <a:t>Practice – Use structured feedback: what worked, what did not, and your proposal.</a:t>
-            </a:r>
-          </a:p>
-          <a:p>
-            <a:pPr>
-              <a:defRPr sz="2000"/>
-            </a:pPr>
-            <a:r>
-              <a:t>Expectation – You are the feedback loop from delivery to architecture.</a:t>
-            </a:r>
-          </a:p>
-          <a:p>
-            <a:pPr>
-              <a:defRPr sz="2000"/>
-            </a:pPr>
-            <a:r>
-              <a:t>Expectation – Help turn SDLC from a document into a living practice.</a:t>
-            </a:r>
-          </a:p>
-        </p:txBody>
-      </p:sp>
-    </p:spTree>
-  </p:cSld>
-  <p:clrMapOvr>
-    <a:masterClrMapping/>
-  </p:clrMapOvr>
+  <p:transition/>
 </p:sld>
 </file>
 
@@ -27465,6 +27985,42 @@
 </file>
 
 <file path=ppt/tags/tag13.xml><?xml version="1.0" encoding="utf-8"?>
+<p:tagLst xmlns:a="http://schemas.openxmlformats.org/drawingml/2006/main" xmlns:r="http://schemas.openxmlformats.org/officeDocument/2006/relationships" xmlns:p="http://schemas.openxmlformats.org/presentationml/2006/main">
+  <p:tag name="SH_REF" val="aW1kVjdBYzdrL0tRa1U3K1NiRmZZY2FmNGptWFVjUis3bDVqR09hbUJZakUwWEF4QzVIZW1MU3dyWWhiZW9BUA%3D%3D"/>
+  <p:tag name="SLIDEHUBID" val="43646238249237460485576d8c3bb136e3caa095c743c4ea83aa50aa7eb6b6100843272"/>
+  <p:tag name="SLIDEHUBID_NEW" val="updated"/>
+  <p:tag name="SLIDEHUBUPDATETIME" val="2026-01-29 09:29:23.229"/>
+</p:tagLst>
+</file>
+
+<file path=ppt/tags/tag14.xml><?xml version="1.0" encoding="utf-8"?>
+<p:tagLst xmlns:a="http://schemas.openxmlformats.org/drawingml/2006/main" xmlns:r="http://schemas.openxmlformats.org/officeDocument/2006/relationships" xmlns:p="http://schemas.openxmlformats.org/presentationml/2006/main">
+  <p:tag name="SH_REF" val="aW1kVjdBYzdrL0tRa1U3K1NiRmZZY2FmNGptWFVjUis3bDVqR09hbUJZakUwWEF4QzVIZW1MU3dyWWhiZW9BUA%3D%3D"/>
+  <p:tag name="SLIDEHUBID" val="43646238249237460485576d8c3bb136e3caa095c743c4ea83aa50aa7eb6b6100843272"/>
+  <p:tag name="SLIDEHUBID_NEW" val="updated"/>
+  <p:tag name="SLIDEHUBUPDATETIME" val="2026-01-29 09:29:23.229"/>
+</p:tagLst>
+</file>
+
+<file path=ppt/tags/tag15.xml><?xml version="1.0" encoding="utf-8"?>
+<p:tagLst xmlns:a="http://schemas.openxmlformats.org/drawingml/2006/main" xmlns:r="http://schemas.openxmlformats.org/officeDocument/2006/relationships" xmlns:p="http://schemas.openxmlformats.org/presentationml/2006/main">
+  <p:tag name="SH_REF" val="aW1kVjdBYzdrL0tRa1U3K1NiRmZZY2FmNGptWFVjUis3bDVqR09hbUJZakUwWEF4QzVIZW1MU3dyWWhiZW9BUA%3D%3D"/>
+  <p:tag name="SLIDEHUBID" val="43646238249237460485576d8c3bb136e3caa095c743c4ea83aa50aa7eb6b6100843272"/>
+  <p:tag name="SLIDEHUBID_NEW" val="updated"/>
+  <p:tag name="SLIDEHUBUPDATETIME" val="2026-01-29 09:29:23.229"/>
+</p:tagLst>
+</file>
+
+<file path=ppt/tags/tag16.xml><?xml version="1.0" encoding="utf-8"?>
+<p:tagLst xmlns:a="http://schemas.openxmlformats.org/drawingml/2006/main" xmlns:r="http://schemas.openxmlformats.org/officeDocument/2006/relationships" xmlns:p="http://schemas.openxmlformats.org/presentationml/2006/main">
+  <p:tag name="SH_REF" val="aW1kVjdBYzdrL0tRa1U3K1NiRmZZY2FmNGptWFVjUis3bDVqR09hbUJZakUwWEF4QzVIZW1MU3dyWWhiZW9BUA%3D%3D"/>
+  <p:tag name="SLIDEHUBID" val="43646238249237460485576d8c3bb136e3caa095c743c4ea83aa50aa7eb6b6100843272"/>
+  <p:tag name="SLIDEHUBID_NEW" val="updated"/>
+  <p:tag name="SLIDEHUBUPDATETIME" val="2026-01-29 09:29:23.229"/>
+</p:tagLst>
+</file>
+
+<file path=ppt/tags/tag17.xml><?xml version="1.0" encoding="utf-8"?>
 <p:tagLst xmlns:a="http://schemas.openxmlformats.org/drawingml/2006/main" xmlns:r="http://schemas.openxmlformats.org/officeDocument/2006/relationships" xmlns:p="http://schemas.openxmlformats.org/presentationml/2006/main">
   <p:tag name="SH_REF" val="aW1kVjdBYzdrL0tRa1U3K1NiRmZZY2FmNGptWFVjUis3bDVqR09hbUJZakUwWEF4QzVIZW1MU3dyWWhiZW9BUA%3D%3D"/>
   <p:tag name="SLIDEHUBID" val="43646238249237460485576d8c3bb136e3caa095c743c4ea83aa50aa7eb6b6100843272"/>
@@ -28336,6 +28892,6 @@
 
 <file path=docMetadata/LabelInfo.xml><?xml version="1.0" encoding="utf-8"?>
 <clbl:labelList xmlns:clbl="http://schemas.microsoft.com/office/2020/mipLabelMetadata">
-  <clbl:label id="{70ea2e9a-ed1c-457b-8cb8-a3ba3a87d0ba}" enabled="1" method="Privileged" siteId="{7597b9d4-4dbf-4a04-888f-21d6563b1812}" contentBits="0" removed="0"/>
+  <clbl:label id="{70ea2e9a-ed1c-457b-8cb8-a3ba3a87d0ba}" enabled="1" method="Privileged" siteId="{7597b9d4-4dbf-4a04-888f-21d6563b1812}" removed="0"/>
 </clbl:labelList>
 </file>